--- a/docs/ppt/SpaceAdmin ERP.pptx
+++ b/docs/ppt/SpaceAdmin ERP.pptx
@@ -22982,1989 +22982,6 @@
       </p:grpSpPr>
       <p:sp>
         <p:nvSpPr>
-          <p:cNvPr id="7" name="Rectangle 6"/>
-          <p:cNvSpPr/>
-          <p:nvPr/>
-        </p:nvSpPr>
-        <p:spPr>
-          <a:xfrm>
-            <a:off x="390525" y="1901131"/>
-            <a:ext cx="3663999" cy="3408168"/>
-          </a:xfrm>
-          <a:prstGeom prst="rect">
-            <a:avLst/>
-          </a:prstGeom>
-          <a:solidFill>
-            <a:srgbClr val="F1F5F9"/>
-          </a:solidFill>
-          <a:ln>
-            <a:noFill/>
-          </a:ln>
-          <a:effectLst/>
-        </p:spPr>
-        <p:style>
-          <a:lnRef idx="1">
-            <a:schemeClr val="accent1"/>
-          </a:lnRef>
-          <a:fillRef idx="3">
-            <a:schemeClr val="accent1"/>
-          </a:fillRef>
-          <a:effectRef idx="2">
-            <a:schemeClr val="accent1"/>
-          </a:effectRef>
-          <a:fontRef idx="minor">
-            <a:schemeClr val="lt1"/>
-          </a:fontRef>
-        </p:style>
-        <p:txBody>
-          <a:bodyPr rtlCol="0" anchor="ctr"/>
-          <a:lstStyle/>
-          <a:p>
-            <a:pPr algn="ctr"/>
-            <a:endParaRPr/>
-          </a:p>
-        </p:txBody>
-      </p:sp>
-      <p:sp>
-        <p:nvSpPr>
-          <p:cNvPr id="2" name="Rounded Rectangle 1"/>
-          <p:cNvSpPr/>
-          <p:nvPr/>
-        </p:nvSpPr>
-        <p:spPr>
-          <a:xfrm>
-            <a:off x="381000" y="977206"/>
-            <a:ext cx="3683049" cy="4332094"/>
-          </a:xfrm>
-          <a:prstGeom prst="roundRect">
-            <a:avLst>
-              <a:gd name="adj" fmla="val 3103"/>
-            </a:avLst>
-          </a:prstGeom>
-          <a:solidFill>
-            <a:srgbClr val="F8FAFC"/>
-          </a:solidFill>
-          <a:ln w="9525">
-            <a:solidFill>
-              <a:srgbClr val="E2E8F0"/>
-            </a:solidFill>
-          </a:ln>
-          <a:effectLst/>
-        </p:spPr>
-        <p:style>
-          <a:lnRef idx="1">
-            <a:schemeClr val="accent1"/>
-          </a:lnRef>
-          <a:fillRef idx="3">
-            <a:schemeClr val="accent1"/>
-          </a:fillRef>
-          <a:effectRef idx="2">
-            <a:schemeClr val="accent1"/>
-          </a:effectRef>
-          <a:fontRef idx="minor">
-            <a:schemeClr val="lt1"/>
-          </a:fontRef>
-        </p:style>
-        <p:txBody>
-          <a:bodyPr rtlCol="0" anchor="ctr"/>
-          <a:lstStyle/>
-          <a:p>
-            <a:pPr algn="ctr"/>
-            <a:endParaRPr/>
-          </a:p>
-        </p:txBody>
-      </p:sp>
-      <p:sp>
-        <p:nvSpPr>
-          <p:cNvPr id="99" name="Rounded Rectangle 22">
-            <a:extLst>
-              <a:ext uri="{FF2B5EF4-FFF2-40B4-BE49-F238E27FC236}">
-                <a16:creationId xmlns:a16="http://schemas.microsoft.com/office/drawing/2014/main" id="{F1F71F69-6C46-46D9-A40B-955714EAB1FF}"/>
-              </a:ext>
-            </a:extLst>
-          </p:cNvPr>
-          <p:cNvSpPr/>
-          <p:nvPr/>
-        </p:nvSpPr>
-        <p:spPr>
-          <a:xfrm>
-            <a:off x="532106" y="3955902"/>
-            <a:ext cx="3397299" cy="1264988"/>
-          </a:xfrm>
-          <a:prstGeom prst="roundRect">
-            <a:avLst>
-              <a:gd name="adj" fmla="val 4036"/>
-            </a:avLst>
-          </a:prstGeom>
-          <a:solidFill>
-            <a:srgbClr val="FFFFFF"/>
-          </a:solidFill>
-          <a:ln w="19050">
-            <a:solidFill>
-              <a:srgbClr val="CBD5E1"/>
-            </a:solidFill>
-          </a:ln>
-          <a:effectLst/>
-        </p:spPr>
-        <p:style>
-          <a:lnRef idx="1">
-            <a:schemeClr val="accent1"/>
-          </a:lnRef>
-          <a:fillRef idx="3">
-            <a:schemeClr val="accent1"/>
-          </a:fillRef>
-          <a:effectRef idx="2">
-            <a:schemeClr val="accent1"/>
-          </a:effectRef>
-          <a:fontRef idx="minor">
-            <a:schemeClr val="lt1"/>
-          </a:fontRef>
-        </p:style>
-        <p:txBody>
-          <a:bodyPr rtlCol="0" anchor="ctr"/>
-          <a:lstStyle/>
-          <a:p>
-            <a:pPr algn="ctr"/>
-            <a:endParaRPr/>
-          </a:p>
-        </p:txBody>
-      </p:sp>
-      <p:sp>
-        <p:nvSpPr>
-          <p:cNvPr id="3" name="Rounded Rectangle 2"/>
-          <p:cNvSpPr/>
-          <p:nvPr/>
-        </p:nvSpPr>
-        <p:spPr>
-          <a:xfrm>
-            <a:off x="4244071" y="977205"/>
-            <a:ext cx="3683049" cy="5652194"/>
-          </a:xfrm>
-          <a:prstGeom prst="roundRect">
-            <a:avLst>
-              <a:gd name="adj" fmla="val 3103"/>
-            </a:avLst>
-          </a:prstGeom>
-          <a:solidFill>
-            <a:srgbClr val="F8FAFC"/>
-          </a:solidFill>
-          <a:ln w="9525">
-            <a:solidFill>
-              <a:srgbClr val="E2E8F0"/>
-            </a:solidFill>
-          </a:ln>
-          <a:effectLst/>
-        </p:spPr>
-        <p:style>
-          <a:lnRef idx="1">
-            <a:schemeClr val="accent1"/>
-          </a:lnRef>
-          <a:fillRef idx="3">
-            <a:schemeClr val="accent1"/>
-          </a:fillRef>
-          <a:effectRef idx="2">
-            <a:schemeClr val="accent1"/>
-          </a:effectRef>
-          <a:fontRef idx="minor">
-            <a:schemeClr val="lt1"/>
-          </a:fontRef>
-        </p:style>
-        <p:txBody>
-          <a:bodyPr rtlCol="0" anchor="ctr"/>
-          <a:lstStyle/>
-          <a:p>
-            <a:pPr algn="ctr"/>
-            <a:endParaRPr/>
-          </a:p>
-        </p:txBody>
-      </p:sp>
-      <p:sp>
-        <p:nvSpPr>
-          <p:cNvPr id="4" name="Rounded Rectangle 3"/>
-          <p:cNvSpPr/>
-          <p:nvPr/>
-        </p:nvSpPr>
-        <p:spPr>
-          <a:xfrm>
-            <a:off x="8128099" y="977205"/>
-            <a:ext cx="3683049" cy="4775895"/>
-          </a:xfrm>
-          <a:prstGeom prst="roundRect">
-            <a:avLst>
-              <a:gd name="adj" fmla="val 3103"/>
-            </a:avLst>
-          </a:prstGeom>
-          <a:solidFill>
-            <a:srgbClr val="F8FAFC"/>
-          </a:solidFill>
-          <a:ln w="9525">
-            <a:solidFill>
-              <a:srgbClr val="E2E8F0"/>
-            </a:solidFill>
-          </a:ln>
-          <a:effectLst/>
-        </p:spPr>
-        <p:style>
-          <a:lnRef idx="1">
-            <a:schemeClr val="accent1"/>
-          </a:lnRef>
-          <a:fillRef idx="3">
-            <a:schemeClr val="accent1"/>
-          </a:fillRef>
-          <a:effectRef idx="2">
-            <a:schemeClr val="accent1"/>
-          </a:effectRef>
-          <a:fontRef idx="minor">
-            <a:schemeClr val="lt1"/>
-          </a:fontRef>
-        </p:style>
-        <p:txBody>
-          <a:bodyPr rtlCol="0" anchor="ctr"/>
-          <a:lstStyle/>
-          <a:p>
-            <a:pPr algn="ctr"/>
-            <a:endParaRPr/>
-          </a:p>
-        </p:txBody>
-      </p:sp>
-      <p:sp>
-        <p:nvSpPr>
-          <p:cNvPr id="5" name="Rectangle 4"/>
-          <p:cNvSpPr/>
-          <p:nvPr/>
-        </p:nvSpPr>
-        <p:spPr>
-          <a:xfrm>
-            <a:off x="390525" y="986730"/>
-            <a:ext cx="3663999" cy="419100"/>
-          </a:xfrm>
-          <a:prstGeom prst="rect">
-            <a:avLst/>
-          </a:prstGeom>
-          <a:solidFill>
-            <a:srgbClr val="1F3A5F"/>
-          </a:solidFill>
-          <a:ln>
-            <a:noFill/>
-          </a:ln>
-          <a:effectLst/>
-        </p:spPr>
-        <p:style>
-          <a:lnRef idx="1">
-            <a:schemeClr val="accent1"/>
-          </a:lnRef>
-          <a:fillRef idx="3">
-            <a:schemeClr val="accent1"/>
-          </a:fillRef>
-          <a:effectRef idx="2">
-            <a:schemeClr val="accent1"/>
-          </a:effectRef>
-          <a:fontRef idx="minor">
-            <a:schemeClr val="lt1"/>
-          </a:fontRef>
-        </p:style>
-        <p:txBody>
-          <a:bodyPr rtlCol="0" anchor="ctr"/>
-          <a:lstStyle/>
-          <a:p>
-            <a:pPr algn="ctr"/>
-            <a:endParaRPr/>
-          </a:p>
-        </p:txBody>
-      </p:sp>
-      <p:sp>
-        <p:nvSpPr>
-          <p:cNvPr id="6" name="Rectangle 5"/>
-          <p:cNvSpPr/>
-          <p:nvPr/>
-        </p:nvSpPr>
-        <p:spPr>
-          <a:xfrm>
-            <a:off x="390525" y="1405830"/>
-            <a:ext cx="3663999" cy="495300"/>
-          </a:xfrm>
-          <a:prstGeom prst="rect">
-            <a:avLst/>
-          </a:prstGeom>
-          <a:solidFill>
-            <a:srgbClr val="FFFFFF"/>
-          </a:solidFill>
-          <a:ln>
-            <a:noFill/>
-          </a:ln>
-          <a:effectLst/>
-        </p:spPr>
-        <p:style>
-          <a:lnRef idx="1">
-            <a:schemeClr val="accent1"/>
-          </a:lnRef>
-          <a:fillRef idx="3">
-            <a:schemeClr val="accent1"/>
-          </a:fillRef>
-          <a:effectRef idx="2">
-            <a:schemeClr val="accent1"/>
-          </a:effectRef>
-          <a:fontRef idx="minor">
-            <a:schemeClr val="lt1"/>
-          </a:fontRef>
-        </p:style>
-        <p:txBody>
-          <a:bodyPr rtlCol="0" anchor="ctr"/>
-          <a:lstStyle/>
-          <a:p>
-            <a:pPr algn="ctr"/>
-            <a:endParaRPr/>
-          </a:p>
-        </p:txBody>
-      </p:sp>
-      <p:sp>
-        <p:nvSpPr>
-          <p:cNvPr id="8" name="Rectangle 7"/>
-          <p:cNvSpPr/>
-          <p:nvPr/>
-        </p:nvSpPr>
-        <p:spPr>
-          <a:xfrm>
-            <a:off x="390525" y="1891605"/>
-            <a:ext cx="3663999" cy="9525"/>
-          </a:xfrm>
-          <a:prstGeom prst="rect">
-            <a:avLst/>
-          </a:prstGeom>
-          <a:solidFill>
-            <a:srgbClr val="E2E8F0"/>
-          </a:solidFill>
-          <a:ln>
-            <a:noFill/>
-          </a:ln>
-          <a:effectLst/>
-        </p:spPr>
-        <p:style>
-          <a:lnRef idx="1">
-            <a:schemeClr val="accent1"/>
-          </a:lnRef>
-          <a:fillRef idx="3">
-            <a:schemeClr val="accent1"/>
-          </a:fillRef>
-          <a:effectRef idx="2">
-            <a:schemeClr val="accent1"/>
-          </a:effectRef>
-          <a:fontRef idx="minor">
-            <a:schemeClr val="lt1"/>
-          </a:fontRef>
-        </p:style>
-        <p:txBody>
-          <a:bodyPr rtlCol="0" anchor="ctr"/>
-          <a:lstStyle/>
-          <a:p>
-            <a:pPr algn="ctr"/>
-            <a:endParaRPr/>
-          </a:p>
-        </p:txBody>
-      </p:sp>
-      <p:sp>
-        <p:nvSpPr>
-          <p:cNvPr id="11" name="Rectangle 10"/>
-          <p:cNvSpPr/>
-          <p:nvPr/>
-        </p:nvSpPr>
-        <p:spPr>
-          <a:xfrm>
-            <a:off x="4264074" y="986730"/>
-            <a:ext cx="3663999" cy="419100"/>
-          </a:xfrm>
-          <a:prstGeom prst="rect">
-            <a:avLst/>
-          </a:prstGeom>
-          <a:solidFill>
-            <a:srgbClr val="E8590C"/>
-          </a:solidFill>
-          <a:ln>
-            <a:noFill/>
-          </a:ln>
-          <a:effectLst/>
-        </p:spPr>
-        <p:style>
-          <a:lnRef idx="1">
-            <a:schemeClr val="accent1"/>
-          </a:lnRef>
-          <a:fillRef idx="3">
-            <a:schemeClr val="accent1"/>
-          </a:fillRef>
-          <a:effectRef idx="2">
-            <a:schemeClr val="accent1"/>
-          </a:effectRef>
-          <a:fontRef idx="minor">
-            <a:schemeClr val="lt1"/>
-          </a:fontRef>
-        </p:style>
-        <p:txBody>
-          <a:bodyPr rtlCol="0" anchor="ctr"/>
-          <a:lstStyle/>
-          <a:p>
-            <a:pPr algn="ctr"/>
-            <a:endParaRPr/>
-          </a:p>
-        </p:txBody>
-      </p:sp>
-      <p:sp>
-        <p:nvSpPr>
-          <p:cNvPr id="12" name="Rectangle 11"/>
-          <p:cNvSpPr/>
-          <p:nvPr/>
-        </p:nvSpPr>
-        <p:spPr>
-          <a:xfrm>
-            <a:off x="4264074" y="1405830"/>
-            <a:ext cx="3663999" cy="605135"/>
-          </a:xfrm>
-          <a:prstGeom prst="rect">
-            <a:avLst/>
-          </a:prstGeom>
-          <a:solidFill>
-            <a:srgbClr val="FFFFFF"/>
-          </a:solidFill>
-          <a:ln>
-            <a:noFill/>
-          </a:ln>
-          <a:effectLst/>
-        </p:spPr>
-        <p:style>
-          <a:lnRef idx="1">
-            <a:schemeClr val="accent1"/>
-          </a:lnRef>
-          <a:fillRef idx="3">
-            <a:schemeClr val="accent1"/>
-          </a:fillRef>
-          <a:effectRef idx="2">
-            <a:schemeClr val="accent1"/>
-          </a:effectRef>
-          <a:fontRef idx="minor">
-            <a:schemeClr val="lt1"/>
-          </a:fontRef>
-        </p:style>
-        <p:txBody>
-          <a:bodyPr rtlCol="0" anchor="ctr"/>
-          <a:lstStyle/>
-          <a:p>
-            <a:pPr algn="ctr"/>
-            <a:endParaRPr/>
-          </a:p>
-        </p:txBody>
-      </p:sp>
-      <p:sp>
-        <p:nvSpPr>
-          <p:cNvPr id="13" name="Rectangle 12"/>
-          <p:cNvSpPr/>
-          <p:nvPr/>
-        </p:nvSpPr>
-        <p:spPr>
-          <a:xfrm>
-            <a:off x="4264074" y="2010965"/>
-            <a:ext cx="3663999" cy="3846909"/>
-          </a:xfrm>
-          <a:prstGeom prst="rect">
-            <a:avLst/>
-          </a:prstGeom>
-          <a:solidFill>
-            <a:srgbClr val="F1F5F9"/>
-          </a:solidFill>
-          <a:ln>
-            <a:noFill/>
-          </a:ln>
-          <a:effectLst/>
-        </p:spPr>
-        <p:style>
-          <a:lnRef idx="1">
-            <a:schemeClr val="accent1"/>
-          </a:lnRef>
-          <a:fillRef idx="3">
-            <a:schemeClr val="accent1"/>
-          </a:fillRef>
-          <a:effectRef idx="2">
-            <a:schemeClr val="accent1"/>
-          </a:effectRef>
-          <a:fontRef idx="minor">
-            <a:schemeClr val="lt1"/>
-          </a:fontRef>
-        </p:style>
-        <p:txBody>
-          <a:bodyPr rtlCol="0" anchor="ctr"/>
-          <a:lstStyle/>
-          <a:p>
-            <a:pPr algn="ctr"/>
-            <a:endParaRPr/>
-          </a:p>
-        </p:txBody>
-      </p:sp>
-      <p:sp>
-        <p:nvSpPr>
-          <p:cNvPr id="14" name="Rectangle 13"/>
-          <p:cNvSpPr/>
-          <p:nvPr/>
-        </p:nvSpPr>
-        <p:spPr>
-          <a:xfrm>
-            <a:off x="4264074" y="2001440"/>
-            <a:ext cx="3663999" cy="9525"/>
-          </a:xfrm>
-          <a:prstGeom prst="rect">
-            <a:avLst/>
-          </a:prstGeom>
-          <a:solidFill>
-            <a:srgbClr val="E2E8F0"/>
-          </a:solidFill>
-          <a:ln>
-            <a:noFill/>
-          </a:ln>
-          <a:effectLst/>
-        </p:spPr>
-        <p:style>
-          <a:lnRef idx="1">
-            <a:schemeClr val="accent1"/>
-          </a:lnRef>
-          <a:fillRef idx="3">
-            <a:schemeClr val="accent1"/>
-          </a:fillRef>
-          <a:effectRef idx="2">
-            <a:schemeClr val="accent1"/>
-          </a:effectRef>
-          <a:fontRef idx="minor">
-            <a:schemeClr val="lt1"/>
-          </a:fontRef>
-        </p:style>
-        <p:txBody>
-          <a:bodyPr rtlCol="0" anchor="ctr"/>
-          <a:lstStyle/>
-          <a:p>
-            <a:pPr algn="ctr"/>
-            <a:endParaRPr/>
-          </a:p>
-        </p:txBody>
-      </p:sp>
-      <p:sp>
-        <p:nvSpPr>
-          <p:cNvPr id="16" name="Rectangle 15"/>
-          <p:cNvSpPr/>
-          <p:nvPr/>
-        </p:nvSpPr>
-        <p:spPr>
-          <a:xfrm>
-            <a:off x="4264074" y="5857875"/>
-            <a:ext cx="3663999" cy="9525"/>
-          </a:xfrm>
-          <a:prstGeom prst="rect">
-            <a:avLst/>
-          </a:prstGeom>
-          <a:solidFill>
-            <a:srgbClr val="E2E8F0"/>
-          </a:solidFill>
-          <a:ln>
-            <a:noFill/>
-          </a:ln>
-          <a:effectLst/>
-        </p:spPr>
-        <p:style>
-          <a:lnRef idx="1">
-            <a:schemeClr val="accent1"/>
-          </a:lnRef>
-          <a:fillRef idx="3">
-            <a:schemeClr val="accent1"/>
-          </a:fillRef>
-          <a:effectRef idx="2">
-            <a:schemeClr val="accent1"/>
-          </a:effectRef>
-          <a:fontRef idx="minor">
-            <a:schemeClr val="lt1"/>
-          </a:fontRef>
-        </p:style>
-        <p:txBody>
-          <a:bodyPr rtlCol="0" anchor="ctr"/>
-          <a:lstStyle/>
-          <a:p>
-            <a:pPr algn="ctr"/>
-            <a:endParaRPr/>
-          </a:p>
-        </p:txBody>
-      </p:sp>
-      <p:sp>
-        <p:nvSpPr>
-          <p:cNvPr id="17" name="Rectangle 16"/>
-          <p:cNvSpPr/>
-          <p:nvPr/>
-        </p:nvSpPr>
-        <p:spPr>
-          <a:xfrm>
-            <a:off x="8137624" y="986730"/>
-            <a:ext cx="3663999" cy="419100"/>
-          </a:xfrm>
-          <a:prstGeom prst="rect">
-            <a:avLst/>
-          </a:prstGeom>
-          <a:solidFill>
-            <a:srgbClr val="0B7285"/>
-          </a:solidFill>
-          <a:ln>
-            <a:noFill/>
-          </a:ln>
-          <a:effectLst/>
-        </p:spPr>
-        <p:style>
-          <a:lnRef idx="1">
-            <a:schemeClr val="accent1"/>
-          </a:lnRef>
-          <a:fillRef idx="3">
-            <a:schemeClr val="accent1"/>
-          </a:fillRef>
-          <a:effectRef idx="2">
-            <a:schemeClr val="accent1"/>
-          </a:effectRef>
-          <a:fontRef idx="minor">
-            <a:schemeClr val="lt1"/>
-          </a:fontRef>
-        </p:style>
-        <p:txBody>
-          <a:bodyPr rtlCol="0" anchor="ctr"/>
-          <a:lstStyle/>
-          <a:p>
-            <a:pPr algn="ctr"/>
-            <a:endParaRPr/>
-          </a:p>
-        </p:txBody>
-      </p:sp>
-      <p:sp>
-        <p:nvSpPr>
-          <p:cNvPr id="18" name="Rectangle 17"/>
-          <p:cNvSpPr/>
-          <p:nvPr/>
-        </p:nvSpPr>
-        <p:spPr>
-          <a:xfrm>
-            <a:off x="8137624" y="1405830"/>
-            <a:ext cx="3663999" cy="623887"/>
-          </a:xfrm>
-          <a:prstGeom prst="rect">
-            <a:avLst/>
-          </a:prstGeom>
-          <a:solidFill>
-            <a:srgbClr val="FFFFFF"/>
-          </a:solidFill>
-          <a:ln>
-            <a:noFill/>
-          </a:ln>
-          <a:effectLst/>
-        </p:spPr>
-        <p:style>
-          <a:lnRef idx="1">
-            <a:schemeClr val="accent1"/>
-          </a:lnRef>
-          <a:fillRef idx="3">
-            <a:schemeClr val="accent1"/>
-          </a:fillRef>
-          <a:effectRef idx="2">
-            <a:schemeClr val="accent1"/>
-          </a:effectRef>
-          <a:fontRef idx="minor">
-            <a:schemeClr val="lt1"/>
-          </a:fontRef>
-        </p:style>
-        <p:txBody>
-          <a:bodyPr rtlCol="0" anchor="ctr"/>
-          <a:lstStyle/>
-          <a:p>
-            <a:pPr algn="ctr"/>
-            <a:endParaRPr/>
-          </a:p>
-        </p:txBody>
-      </p:sp>
-      <p:sp>
-        <p:nvSpPr>
-          <p:cNvPr id="19" name="Rectangle 18"/>
-          <p:cNvSpPr/>
-          <p:nvPr/>
-        </p:nvSpPr>
-        <p:spPr>
-          <a:xfrm>
-            <a:off x="8137624" y="2029718"/>
-            <a:ext cx="3663999" cy="3818631"/>
-          </a:xfrm>
-          <a:prstGeom prst="rect">
-            <a:avLst/>
-          </a:prstGeom>
-          <a:solidFill>
-            <a:srgbClr val="F1F5F9"/>
-          </a:solidFill>
-          <a:ln>
-            <a:noFill/>
-          </a:ln>
-          <a:effectLst/>
-        </p:spPr>
-        <p:style>
-          <a:lnRef idx="1">
-            <a:schemeClr val="accent1"/>
-          </a:lnRef>
-          <a:fillRef idx="3">
-            <a:schemeClr val="accent1"/>
-          </a:fillRef>
-          <a:effectRef idx="2">
-            <a:schemeClr val="accent1"/>
-          </a:effectRef>
-          <a:fontRef idx="minor">
-            <a:schemeClr val="lt1"/>
-          </a:fontRef>
-        </p:style>
-        <p:txBody>
-          <a:bodyPr rtlCol="0" anchor="ctr"/>
-          <a:lstStyle/>
-          <a:p>
-            <a:pPr algn="ctr"/>
-            <a:endParaRPr/>
-          </a:p>
-        </p:txBody>
-      </p:sp>
-      <p:sp>
-        <p:nvSpPr>
-          <p:cNvPr id="20" name="Rectangle 19"/>
-          <p:cNvSpPr/>
-          <p:nvPr/>
-        </p:nvSpPr>
-        <p:spPr>
-          <a:xfrm>
-            <a:off x="8137624" y="2020192"/>
-            <a:ext cx="3663999" cy="9525"/>
-          </a:xfrm>
-          <a:prstGeom prst="rect">
-            <a:avLst/>
-          </a:prstGeom>
-          <a:solidFill>
-            <a:srgbClr val="E2E8F0"/>
-          </a:solidFill>
-          <a:ln>
-            <a:noFill/>
-          </a:ln>
-          <a:effectLst/>
-        </p:spPr>
-        <p:style>
-          <a:lnRef idx="1">
-            <a:schemeClr val="accent1"/>
-          </a:lnRef>
-          <a:fillRef idx="3">
-            <a:schemeClr val="accent1"/>
-          </a:fillRef>
-          <a:effectRef idx="2">
-            <a:schemeClr val="accent1"/>
-          </a:effectRef>
-          <a:fontRef idx="minor">
-            <a:schemeClr val="lt1"/>
-          </a:fontRef>
-        </p:style>
-        <p:txBody>
-          <a:bodyPr rtlCol="0" anchor="ctr"/>
-          <a:lstStyle/>
-          <a:p>
-            <a:pPr algn="ctr"/>
-            <a:endParaRPr/>
-          </a:p>
-        </p:txBody>
-      </p:sp>
-      <p:sp>
-        <p:nvSpPr>
-          <p:cNvPr id="23" name="Rounded Rectangle 22"/>
-          <p:cNvSpPr/>
-          <p:nvPr/>
-        </p:nvSpPr>
-        <p:spPr>
-          <a:xfrm>
-            <a:off x="523875" y="2034480"/>
-            <a:ext cx="3397299" cy="1887884"/>
-          </a:xfrm>
-          <a:prstGeom prst="roundRect">
-            <a:avLst>
-              <a:gd name="adj" fmla="val 4036"/>
-            </a:avLst>
-          </a:prstGeom>
-          <a:solidFill>
-            <a:srgbClr val="FFFFFF"/>
-          </a:solidFill>
-          <a:ln w="19050">
-            <a:solidFill>
-              <a:srgbClr val="CBD5E1"/>
-            </a:solidFill>
-          </a:ln>
-          <a:effectLst/>
-        </p:spPr>
-        <p:style>
-          <a:lnRef idx="1">
-            <a:schemeClr val="accent1"/>
-          </a:lnRef>
-          <a:fillRef idx="3">
-            <a:schemeClr val="accent1"/>
-          </a:fillRef>
-          <a:effectRef idx="2">
-            <a:schemeClr val="accent1"/>
-          </a:effectRef>
-          <a:fontRef idx="minor">
-            <a:schemeClr val="lt1"/>
-          </a:fontRef>
-        </p:style>
-        <p:txBody>
-          <a:bodyPr rtlCol="0" anchor="ctr"/>
-          <a:lstStyle/>
-          <a:p>
-            <a:pPr algn="ctr"/>
-            <a:endParaRPr/>
-          </a:p>
-        </p:txBody>
-      </p:sp>
-      <p:sp>
-        <p:nvSpPr>
-          <p:cNvPr id="25" name="Rounded Rectangle 24"/>
-          <p:cNvSpPr/>
-          <p:nvPr/>
-        </p:nvSpPr>
-        <p:spPr>
-          <a:xfrm>
-            <a:off x="4397424" y="2372915"/>
-            <a:ext cx="3397299" cy="800100"/>
-          </a:xfrm>
-          <a:prstGeom prst="roundRect">
-            <a:avLst>
-              <a:gd name="adj" fmla="val 9523"/>
-            </a:avLst>
-          </a:prstGeom>
-          <a:solidFill>
-            <a:srgbClr val="FEF2F2"/>
-          </a:solidFill>
-          <a:ln w="19050">
-            <a:solidFill>
-              <a:srgbClr val="EF4444"/>
-            </a:solidFill>
-          </a:ln>
-          <a:effectLst/>
-        </p:spPr>
-        <p:style>
-          <a:lnRef idx="1">
-            <a:schemeClr val="accent1"/>
-          </a:lnRef>
-          <a:fillRef idx="3">
-            <a:schemeClr val="accent1"/>
-          </a:fillRef>
-          <a:effectRef idx="2">
-            <a:schemeClr val="accent1"/>
-          </a:effectRef>
-          <a:fontRef idx="minor">
-            <a:schemeClr val="lt1"/>
-          </a:fontRef>
-        </p:style>
-        <p:txBody>
-          <a:bodyPr rtlCol="0" anchor="ctr"/>
-          <a:lstStyle/>
-          <a:p>
-            <a:pPr algn="ctr"/>
-            <a:endParaRPr/>
-          </a:p>
-        </p:txBody>
-      </p:sp>
-      <p:sp>
-        <p:nvSpPr>
-          <p:cNvPr id="26" name="Rounded Rectangle 25"/>
-          <p:cNvSpPr/>
-          <p:nvPr/>
-        </p:nvSpPr>
-        <p:spPr>
-          <a:xfrm>
-            <a:off x="4397424" y="3658790"/>
-            <a:ext cx="3397299" cy="962025"/>
-          </a:xfrm>
-          <a:prstGeom prst="roundRect">
-            <a:avLst>
-              <a:gd name="adj" fmla="val 7920"/>
-            </a:avLst>
-          </a:prstGeom>
-          <a:solidFill>
-            <a:srgbClr val="FFFFFF"/>
-          </a:solidFill>
-          <a:ln w="19050">
-            <a:solidFill>
-              <a:srgbClr val="CBD5E1"/>
-            </a:solidFill>
-          </a:ln>
-          <a:effectLst/>
-        </p:spPr>
-        <p:style>
-          <a:lnRef idx="1">
-            <a:schemeClr val="accent1"/>
-          </a:lnRef>
-          <a:fillRef idx="3">
-            <a:schemeClr val="accent1"/>
-          </a:fillRef>
-          <a:effectRef idx="2">
-            <a:schemeClr val="accent1"/>
-          </a:effectRef>
-          <a:fontRef idx="minor">
-            <a:schemeClr val="lt1"/>
-          </a:fontRef>
-        </p:style>
-        <p:txBody>
-          <a:bodyPr rtlCol="0" anchor="ctr"/>
-          <a:lstStyle/>
-          <a:p>
-            <a:pPr algn="ctr"/>
-            <a:endParaRPr/>
-          </a:p>
-        </p:txBody>
-      </p:sp>
-      <p:sp>
-        <p:nvSpPr>
-          <p:cNvPr id="27" name="Rounded Rectangle 26"/>
-          <p:cNvSpPr/>
-          <p:nvPr/>
-        </p:nvSpPr>
-        <p:spPr>
-          <a:xfrm>
-            <a:off x="4397424" y="5106590"/>
-            <a:ext cx="3397299" cy="1493814"/>
-          </a:xfrm>
-          <a:prstGeom prst="roundRect">
-            <a:avLst>
-              <a:gd name="adj" fmla="val 9523"/>
-            </a:avLst>
-          </a:prstGeom>
-          <a:solidFill>
-            <a:srgbClr val="FFFFFF"/>
-          </a:solidFill>
-          <a:ln w="19050">
-            <a:solidFill>
-              <a:srgbClr val="CBD5E1"/>
-            </a:solidFill>
-          </a:ln>
-          <a:effectLst/>
-        </p:spPr>
-        <p:style>
-          <a:lnRef idx="1">
-            <a:schemeClr val="accent1"/>
-          </a:lnRef>
-          <a:fillRef idx="3">
-            <a:schemeClr val="accent1"/>
-          </a:fillRef>
-          <a:effectRef idx="2">
-            <a:schemeClr val="accent1"/>
-          </a:effectRef>
-          <a:fontRef idx="minor">
-            <a:schemeClr val="lt1"/>
-          </a:fontRef>
-        </p:style>
-        <p:txBody>
-          <a:bodyPr rtlCol="0" anchor="ctr"/>
-          <a:lstStyle/>
-          <a:p>
-            <a:pPr algn="ctr"/>
-            <a:endParaRPr/>
-          </a:p>
-        </p:txBody>
-      </p:sp>
-      <p:sp>
-        <p:nvSpPr>
-          <p:cNvPr id="28" name="Rounded Rectangle 27"/>
-          <p:cNvSpPr/>
-          <p:nvPr/>
-        </p:nvSpPr>
-        <p:spPr>
-          <a:xfrm>
-            <a:off x="8270974" y="2163067"/>
-            <a:ext cx="3397299" cy="609600"/>
-          </a:xfrm>
-          <a:prstGeom prst="roundRect">
-            <a:avLst>
-              <a:gd name="adj" fmla="val 12500"/>
-            </a:avLst>
-          </a:prstGeom>
-          <a:solidFill>
-            <a:srgbClr val="FFFFFF"/>
-          </a:solidFill>
-          <a:ln w="9525">
-            <a:solidFill>
-              <a:srgbClr val="CBD5E1"/>
-            </a:solidFill>
-          </a:ln>
-          <a:effectLst/>
-        </p:spPr>
-        <p:style>
-          <a:lnRef idx="1">
-            <a:schemeClr val="accent1"/>
-          </a:lnRef>
-          <a:fillRef idx="3">
-            <a:schemeClr val="accent1"/>
-          </a:fillRef>
-          <a:effectRef idx="2">
-            <a:schemeClr val="accent1"/>
-          </a:effectRef>
-          <a:fontRef idx="minor">
-            <a:schemeClr val="lt1"/>
-          </a:fontRef>
-        </p:style>
-        <p:txBody>
-          <a:bodyPr rtlCol="0" anchor="ctr"/>
-          <a:lstStyle/>
-          <a:p>
-            <a:pPr algn="ctr"/>
-            <a:endParaRPr/>
-          </a:p>
-        </p:txBody>
-      </p:sp>
-      <p:sp>
-        <p:nvSpPr>
-          <p:cNvPr id="29" name="Rounded Rectangle 28"/>
-          <p:cNvSpPr/>
-          <p:nvPr/>
-        </p:nvSpPr>
-        <p:spPr>
-          <a:xfrm>
-            <a:off x="8270974" y="2867917"/>
-            <a:ext cx="3397299" cy="2856607"/>
-          </a:xfrm>
-          <a:prstGeom prst="roundRect">
-            <a:avLst>
-              <a:gd name="adj" fmla="val 2667"/>
-            </a:avLst>
-          </a:prstGeom>
-          <a:solidFill>
-            <a:srgbClr val="FFFFFF"/>
-          </a:solidFill>
-          <a:ln w="19050">
-            <a:solidFill>
-              <a:srgbClr val="CBD5E1"/>
-            </a:solidFill>
-          </a:ln>
-          <a:effectLst/>
-        </p:spPr>
-        <p:style>
-          <a:lnRef idx="1">
-            <a:schemeClr val="accent1"/>
-          </a:lnRef>
-          <a:fillRef idx="3">
-            <a:schemeClr val="accent1"/>
-          </a:fillRef>
-          <a:effectRef idx="2">
-            <a:schemeClr val="accent1"/>
-          </a:effectRef>
-          <a:fontRef idx="minor">
-            <a:schemeClr val="lt1"/>
-          </a:fontRef>
-        </p:style>
-        <p:txBody>
-          <a:bodyPr rtlCol="0" anchor="ctr"/>
-          <a:lstStyle/>
-          <a:p>
-            <a:pPr algn="ctr"/>
-            <a:endParaRPr/>
-          </a:p>
-        </p:txBody>
-      </p:sp>
-      <p:sp>
-        <p:nvSpPr>
-          <p:cNvPr id="30" name="Rounded Rectangle 29"/>
-          <p:cNvSpPr/>
-          <p:nvPr/>
-        </p:nvSpPr>
-        <p:spPr>
-          <a:xfrm>
-            <a:off x="4397424" y="2144315"/>
-            <a:ext cx="171450" cy="171450"/>
-          </a:xfrm>
-          <a:prstGeom prst="roundRect">
-            <a:avLst>
-              <a:gd name="adj" fmla="val 50000"/>
-            </a:avLst>
-          </a:prstGeom>
-          <a:solidFill>
-            <a:srgbClr val="E2E8F0"/>
-          </a:solidFill>
-          <a:ln>
-            <a:noFill/>
-          </a:ln>
-          <a:effectLst/>
-        </p:spPr>
-        <p:style>
-          <a:lnRef idx="1">
-            <a:schemeClr val="accent1"/>
-          </a:lnRef>
-          <a:fillRef idx="3">
-            <a:schemeClr val="accent1"/>
-          </a:fillRef>
-          <a:effectRef idx="2">
-            <a:schemeClr val="accent1"/>
-          </a:effectRef>
-          <a:fontRef idx="minor">
-            <a:schemeClr val="lt1"/>
-          </a:fontRef>
-        </p:style>
-        <p:txBody>
-          <a:bodyPr rtlCol="0" anchor="ctr"/>
-          <a:lstStyle/>
-          <a:p>
-            <a:pPr algn="ctr"/>
-            <a:endParaRPr/>
-          </a:p>
-        </p:txBody>
-      </p:sp>
-      <p:sp>
-        <p:nvSpPr>
-          <p:cNvPr id="31" name="Rounded Rectangle 30"/>
-          <p:cNvSpPr/>
-          <p:nvPr/>
-        </p:nvSpPr>
-        <p:spPr>
-          <a:xfrm>
-            <a:off x="4397424" y="3430190"/>
-            <a:ext cx="171450" cy="171450"/>
-          </a:xfrm>
-          <a:prstGeom prst="roundRect">
-            <a:avLst>
-              <a:gd name="adj" fmla="val 50000"/>
-            </a:avLst>
-          </a:prstGeom>
-          <a:solidFill>
-            <a:srgbClr val="E2E8F0"/>
-          </a:solidFill>
-          <a:ln>
-            <a:noFill/>
-          </a:ln>
-          <a:effectLst/>
-        </p:spPr>
-        <p:style>
-          <a:lnRef idx="1">
-            <a:schemeClr val="accent1"/>
-          </a:lnRef>
-          <a:fillRef idx="3">
-            <a:schemeClr val="accent1"/>
-          </a:fillRef>
-          <a:effectRef idx="2">
-            <a:schemeClr val="accent1"/>
-          </a:effectRef>
-          <a:fontRef idx="minor">
-            <a:schemeClr val="lt1"/>
-          </a:fontRef>
-        </p:style>
-        <p:txBody>
-          <a:bodyPr rtlCol="0" anchor="ctr"/>
-          <a:lstStyle/>
-          <a:p>
-            <a:pPr algn="ctr"/>
-            <a:endParaRPr/>
-          </a:p>
-        </p:txBody>
-      </p:sp>
-      <p:sp>
-        <p:nvSpPr>
-          <p:cNvPr id="32" name="Rounded Rectangle 31"/>
-          <p:cNvSpPr/>
-          <p:nvPr/>
-        </p:nvSpPr>
-        <p:spPr>
-          <a:xfrm>
-            <a:off x="4397424" y="4877990"/>
-            <a:ext cx="171450" cy="171450"/>
-          </a:xfrm>
-          <a:prstGeom prst="roundRect">
-            <a:avLst>
-              <a:gd name="adj" fmla="val 50000"/>
-            </a:avLst>
-          </a:prstGeom>
-          <a:solidFill>
-            <a:srgbClr val="E2E8F0"/>
-          </a:solidFill>
-          <a:ln>
-            <a:noFill/>
-          </a:ln>
-          <a:effectLst/>
-        </p:spPr>
-        <p:style>
-          <a:lnRef idx="1">
-            <a:schemeClr val="accent1"/>
-          </a:lnRef>
-          <a:fillRef idx="3">
-            <a:schemeClr val="accent1"/>
-          </a:fillRef>
-          <a:effectRef idx="2">
-            <a:schemeClr val="accent1"/>
-          </a:effectRef>
-          <a:fontRef idx="minor">
-            <a:schemeClr val="lt1"/>
-          </a:fontRef>
-        </p:style>
-        <p:txBody>
-          <a:bodyPr rtlCol="0" anchor="ctr"/>
-          <a:lstStyle/>
-          <a:p>
-            <a:pPr algn="ctr"/>
-            <a:endParaRPr/>
-          </a:p>
-        </p:txBody>
-      </p:sp>
-      <p:sp>
-        <p:nvSpPr>
-          <p:cNvPr id="33" name="Rounded Rectangle 32"/>
-          <p:cNvSpPr/>
-          <p:nvPr/>
-        </p:nvSpPr>
-        <p:spPr>
-          <a:xfrm>
-            <a:off x="8356699" y="2248792"/>
-            <a:ext cx="609600" cy="190500"/>
-          </a:xfrm>
-          <a:prstGeom prst="roundRect">
-            <a:avLst>
-              <a:gd name="adj" fmla="val 20000"/>
-            </a:avLst>
-          </a:prstGeom>
-          <a:solidFill>
-            <a:srgbClr val="E0F2FE"/>
-          </a:solidFill>
-          <a:ln>
-            <a:noFill/>
-          </a:ln>
-          <a:effectLst/>
-        </p:spPr>
-        <p:style>
-          <a:lnRef idx="1">
-            <a:schemeClr val="accent1"/>
-          </a:lnRef>
-          <a:fillRef idx="3">
-            <a:schemeClr val="accent1"/>
-          </a:fillRef>
-          <a:effectRef idx="2">
-            <a:schemeClr val="accent1"/>
-          </a:effectRef>
-          <a:fontRef idx="minor">
-            <a:schemeClr val="lt1"/>
-          </a:fontRef>
-        </p:style>
-        <p:txBody>
-          <a:bodyPr rtlCol="0" anchor="ctr"/>
-          <a:lstStyle/>
-          <a:p>
-            <a:pPr algn="ctr"/>
-            <a:endParaRPr/>
-          </a:p>
-        </p:txBody>
-      </p:sp>
-      <p:sp>
-        <p:nvSpPr>
-          <p:cNvPr id="34" name="Rounded Rectangle 33"/>
-          <p:cNvSpPr/>
-          <p:nvPr/>
-        </p:nvSpPr>
-        <p:spPr>
-          <a:xfrm>
-            <a:off x="9199959" y="2248792"/>
-            <a:ext cx="647700" cy="190500"/>
-          </a:xfrm>
-          <a:prstGeom prst="roundRect">
-            <a:avLst>
-              <a:gd name="adj" fmla="val 20000"/>
-            </a:avLst>
-          </a:prstGeom>
-          <a:solidFill>
-            <a:srgbClr val="E0F2FE"/>
-          </a:solidFill>
-          <a:ln>
-            <a:noFill/>
-          </a:ln>
-          <a:effectLst/>
-        </p:spPr>
-        <p:style>
-          <a:lnRef idx="1">
-            <a:schemeClr val="accent1"/>
-          </a:lnRef>
-          <a:fillRef idx="3">
-            <a:schemeClr val="accent1"/>
-          </a:fillRef>
-          <a:effectRef idx="2">
-            <a:schemeClr val="accent1"/>
-          </a:effectRef>
-          <a:fontRef idx="minor">
-            <a:schemeClr val="lt1"/>
-          </a:fontRef>
-        </p:style>
-        <p:txBody>
-          <a:bodyPr rtlCol="0" anchor="ctr"/>
-          <a:lstStyle/>
-          <a:p>
-            <a:pPr algn="ctr"/>
-            <a:endParaRPr/>
-          </a:p>
-        </p:txBody>
-      </p:sp>
-      <p:sp>
-        <p:nvSpPr>
-          <p:cNvPr id="35" name="Rounded Rectangle 34"/>
-          <p:cNvSpPr/>
-          <p:nvPr/>
-        </p:nvSpPr>
-        <p:spPr>
-          <a:xfrm>
-            <a:off x="10081319" y="2248792"/>
-            <a:ext cx="428625" cy="190500"/>
-          </a:xfrm>
-          <a:prstGeom prst="roundRect">
-            <a:avLst>
-              <a:gd name="adj" fmla="val 20000"/>
-            </a:avLst>
-          </a:prstGeom>
-          <a:solidFill>
-            <a:srgbClr val="E0F2FE"/>
-          </a:solidFill>
-          <a:ln>
-            <a:noFill/>
-          </a:ln>
-          <a:effectLst/>
-        </p:spPr>
-        <p:style>
-          <a:lnRef idx="1">
-            <a:schemeClr val="accent1"/>
-          </a:lnRef>
-          <a:fillRef idx="3">
-            <a:schemeClr val="accent1"/>
-          </a:fillRef>
-          <a:effectRef idx="2">
-            <a:schemeClr val="accent1"/>
-          </a:effectRef>
-          <a:fontRef idx="minor">
-            <a:schemeClr val="lt1"/>
-          </a:fontRef>
-        </p:style>
-        <p:txBody>
-          <a:bodyPr rtlCol="0" anchor="ctr"/>
-          <a:lstStyle/>
-          <a:p>
-            <a:pPr algn="ctr"/>
-            <a:endParaRPr/>
-          </a:p>
-        </p:txBody>
-      </p:sp>
-      <p:sp>
-        <p:nvSpPr>
-          <p:cNvPr id="36" name="Rounded Rectangle 35"/>
-          <p:cNvSpPr/>
-          <p:nvPr/>
-        </p:nvSpPr>
-        <p:spPr>
-          <a:xfrm>
-            <a:off x="10743604" y="2248792"/>
-            <a:ext cx="838200" cy="190500"/>
-          </a:xfrm>
-          <a:prstGeom prst="roundRect">
-            <a:avLst>
-              <a:gd name="adj" fmla="val 20000"/>
-            </a:avLst>
-          </a:prstGeom>
-          <a:solidFill>
-            <a:srgbClr val="E0F2FE"/>
-          </a:solidFill>
-          <a:ln>
-            <a:noFill/>
-          </a:ln>
-          <a:effectLst/>
-        </p:spPr>
-        <p:style>
-          <a:lnRef idx="1">
-            <a:schemeClr val="accent1"/>
-          </a:lnRef>
-          <a:fillRef idx="3">
-            <a:schemeClr val="accent1"/>
-          </a:fillRef>
-          <a:effectRef idx="2">
-            <a:schemeClr val="accent1"/>
-          </a:effectRef>
-          <a:fontRef idx="minor">
-            <a:schemeClr val="lt1"/>
-          </a:fontRef>
-        </p:style>
-        <p:txBody>
-          <a:bodyPr rtlCol="0" anchor="ctr"/>
-          <a:lstStyle/>
-          <a:p>
-            <a:pPr algn="ctr"/>
-            <a:endParaRPr/>
-          </a:p>
-        </p:txBody>
-      </p:sp>
-      <p:sp>
-        <p:nvSpPr>
-          <p:cNvPr id="37" name="Rounded Rectangle 36"/>
-          <p:cNvSpPr/>
-          <p:nvPr/>
-        </p:nvSpPr>
-        <p:spPr>
-          <a:xfrm>
-            <a:off x="8493174" y="2496442"/>
-            <a:ext cx="428625" cy="190500"/>
-          </a:xfrm>
-          <a:prstGeom prst="roundRect">
-            <a:avLst>
-              <a:gd name="adj" fmla="val 20000"/>
-            </a:avLst>
-          </a:prstGeom>
-          <a:solidFill>
-            <a:srgbClr val="E0F2FE"/>
-          </a:solidFill>
-          <a:ln>
-            <a:noFill/>
-          </a:ln>
-          <a:effectLst/>
-        </p:spPr>
-        <p:style>
-          <a:lnRef idx="1">
-            <a:schemeClr val="accent1"/>
-          </a:lnRef>
-          <a:fillRef idx="3">
-            <a:schemeClr val="accent1"/>
-          </a:fillRef>
-          <a:effectRef idx="2">
-            <a:schemeClr val="accent1"/>
-          </a:effectRef>
-          <a:fontRef idx="minor">
-            <a:schemeClr val="lt1"/>
-          </a:fontRef>
-        </p:style>
-        <p:txBody>
-          <a:bodyPr rtlCol="0" anchor="ctr"/>
-          <a:lstStyle/>
-          <a:p>
-            <a:pPr algn="ctr"/>
-            <a:endParaRPr/>
-          </a:p>
-        </p:txBody>
-      </p:sp>
-      <p:sp>
-        <p:nvSpPr>
-          <p:cNvPr id="38" name="Rounded Rectangle 37"/>
-          <p:cNvSpPr/>
-          <p:nvPr/>
-        </p:nvSpPr>
-        <p:spPr>
-          <a:xfrm>
-            <a:off x="9169449" y="2496442"/>
-            <a:ext cx="885825" cy="190500"/>
-          </a:xfrm>
-          <a:prstGeom prst="roundRect">
-            <a:avLst>
-              <a:gd name="adj" fmla="val 20000"/>
-            </a:avLst>
-          </a:prstGeom>
-          <a:solidFill>
-            <a:srgbClr val="CCFBF1"/>
-          </a:solidFill>
-          <a:ln>
-            <a:noFill/>
-          </a:ln>
-          <a:effectLst/>
-        </p:spPr>
-        <p:style>
-          <a:lnRef idx="1">
-            <a:schemeClr val="accent1"/>
-          </a:lnRef>
-          <a:fillRef idx="3">
-            <a:schemeClr val="accent1"/>
-          </a:fillRef>
-          <a:effectRef idx="2">
-            <a:schemeClr val="accent1"/>
-          </a:effectRef>
-          <a:fontRef idx="minor">
-            <a:schemeClr val="lt1"/>
-          </a:fontRef>
-        </p:style>
-        <p:txBody>
-          <a:bodyPr rtlCol="0" anchor="ctr"/>
-          <a:lstStyle/>
-          <a:p>
-            <a:pPr algn="ctr"/>
-            <a:endParaRPr/>
-          </a:p>
-        </p:txBody>
-      </p:sp>
-      <p:sp>
-        <p:nvSpPr>
-          <p:cNvPr id="39" name="Rounded Rectangle 38"/>
-          <p:cNvSpPr/>
-          <p:nvPr/>
-        </p:nvSpPr>
-        <p:spPr>
-          <a:xfrm>
-            <a:off x="10302924" y="2496442"/>
-            <a:ext cx="1143000" cy="190500"/>
-          </a:xfrm>
-          <a:prstGeom prst="roundRect">
-            <a:avLst>
-              <a:gd name="adj" fmla="val 20000"/>
-            </a:avLst>
-          </a:prstGeom>
-          <a:solidFill>
-            <a:srgbClr val="CCFBF1"/>
-          </a:solidFill>
-          <a:ln>
-            <a:noFill/>
-          </a:ln>
-          <a:effectLst/>
-        </p:spPr>
-        <p:style>
-          <a:lnRef idx="1">
-            <a:schemeClr val="accent1"/>
-          </a:lnRef>
-          <a:fillRef idx="3">
-            <a:schemeClr val="accent1"/>
-          </a:fillRef>
-          <a:effectRef idx="2">
-            <a:schemeClr val="accent1"/>
-          </a:effectRef>
-          <a:fontRef idx="minor">
-            <a:schemeClr val="lt1"/>
-          </a:fontRef>
-        </p:style>
-        <p:txBody>
-          <a:bodyPr rtlCol="0" anchor="ctr"/>
-          <a:lstStyle/>
-          <a:p>
-            <a:pPr algn="ctr"/>
-            <a:endParaRPr/>
-          </a:p>
-        </p:txBody>
-      </p:sp>
-      <p:pic>
-        <p:nvPicPr>
-          <p:cNvPr id="40" name="Picture 39" descr="image.png"/>
-          <p:cNvPicPr>
-            <a:picLocks noChangeAspect="1"/>
-          </p:cNvPicPr>
-          <p:nvPr/>
-        </p:nvPicPr>
-        <p:blipFill>
-          <a:blip r:embed="rId2"/>
-          <a:stretch>
-            <a:fillRect/>
-          </a:stretch>
-        </p:blipFill>
-        <p:spPr>
-          <a:xfrm>
-            <a:off x="542925" y="1115317"/>
-            <a:ext cx="161925" cy="161925"/>
-          </a:xfrm>
-          <a:prstGeom prst="rect">
-            <a:avLst/>
-          </a:prstGeom>
-        </p:spPr>
-      </p:pic>
-      <p:pic>
-        <p:nvPicPr>
-          <p:cNvPr id="41" name="Picture 40" descr="image.png"/>
-          <p:cNvPicPr>
-            <a:picLocks noChangeAspect="1"/>
-          </p:cNvPicPr>
-          <p:nvPr/>
-        </p:nvPicPr>
-        <p:blipFill>
-          <a:blip r:embed="rId3"/>
-          <a:stretch>
-            <a:fillRect/>
-          </a:stretch>
-        </p:blipFill>
-        <p:spPr>
-          <a:xfrm>
-            <a:off x="4416474" y="1115317"/>
-            <a:ext cx="161925" cy="161925"/>
-          </a:xfrm>
-          <a:prstGeom prst="rect">
-            <a:avLst/>
-          </a:prstGeom>
-        </p:spPr>
-      </p:pic>
-      <p:pic>
-        <p:nvPicPr>
-          <p:cNvPr id="42" name="Picture 41" descr="image.png"/>
-          <p:cNvPicPr>
-            <a:picLocks noChangeAspect="1"/>
-          </p:cNvPicPr>
-          <p:nvPr/>
-        </p:nvPicPr>
-        <p:blipFill>
-          <a:blip r:embed="rId4"/>
-          <a:stretch>
-            <a:fillRect/>
-          </a:stretch>
-        </p:blipFill>
-        <p:spPr>
-          <a:xfrm>
-            <a:off x="8290024" y="1115317"/>
-            <a:ext cx="180975" cy="161925"/>
-          </a:xfrm>
-          <a:prstGeom prst="rect">
-            <a:avLst/>
-          </a:prstGeom>
-        </p:spPr>
-      </p:pic>
-      <p:pic>
-        <p:nvPicPr>
-          <p:cNvPr id="43" name="Picture 42" descr="image.png"/>
-          <p:cNvPicPr>
-            <a:picLocks noChangeAspect="1"/>
-          </p:cNvPicPr>
-          <p:nvPr/>
-        </p:nvPicPr>
-        <p:blipFill>
-          <a:blip r:embed="rId5"/>
-          <a:stretch>
-            <a:fillRect/>
-          </a:stretch>
-        </p:blipFill>
-        <p:spPr>
-          <a:xfrm>
-            <a:off x="2103387" y="2692598"/>
-            <a:ext cx="238125" cy="190500"/>
-          </a:xfrm>
-          <a:prstGeom prst="rect">
-            <a:avLst/>
-          </a:prstGeom>
-        </p:spPr>
-      </p:pic>
-      <p:pic>
-        <p:nvPicPr>
-          <p:cNvPr id="44" name="Picture 43" descr="image.png"/>
-          <p:cNvPicPr>
-            <a:picLocks noChangeAspect="1"/>
-          </p:cNvPicPr>
-          <p:nvPr/>
-        </p:nvPicPr>
-        <p:blipFill>
-          <a:blip r:embed="rId6"/>
-          <a:stretch>
-            <a:fillRect/>
-          </a:stretch>
-        </p:blipFill>
-        <p:spPr>
-          <a:xfrm>
-            <a:off x="2127200" y="4756695"/>
-            <a:ext cx="190500" cy="190500"/>
-          </a:xfrm>
-          <a:prstGeom prst="rect">
-            <a:avLst/>
-          </a:prstGeom>
-        </p:spPr>
-      </p:pic>
-      <p:pic>
-        <p:nvPicPr>
-          <p:cNvPr id="45" name="Picture 44" descr="image.png"/>
-          <p:cNvPicPr>
-            <a:picLocks noChangeAspect="1"/>
-          </p:cNvPicPr>
-          <p:nvPr/>
-        </p:nvPicPr>
-        <p:blipFill>
-          <a:blip r:embed="rId7"/>
-          <a:stretch>
-            <a:fillRect/>
-          </a:stretch>
-        </p:blipFill>
-        <p:spPr>
-          <a:xfrm>
-            <a:off x="6000750" y="2487215"/>
-            <a:ext cx="190500" cy="190500"/>
-          </a:xfrm>
-          <a:prstGeom prst="rect">
-            <a:avLst/>
-          </a:prstGeom>
-        </p:spPr>
-      </p:pic>
-      <p:pic>
-        <p:nvPicPr>
-          <p:cNvPr id="46" name="Picture 45" descr="image.png"/>
-          <p:cNvPicPr>
-            <a:picLocks noChangeAspect="1"/>
-          </p:cNvPicPr>
-          <p:nvPr/>
-        </p:nvPicPr>
-        <p:blipFill>
-          <a:blip r:embed="rId8"/>
-          <a:stretch>
-            <a:fillRect/>
-          </a:stretch>
-        </p:blipFill>
-        <p:spPr>
-          <a:xfrm>
-            <a:off x="6053137" y="3249215"/>
-            <a:ext cx="85725" cy="114300"/>
-          </a:xfrm>
-          <a:prstGeom prst="rect">
-            <a:avLst/>
-          </a:prstGeom>
-        </p:spPr>
-      </p:pic>
-      <p:pic>
-        <p:nvPicPr>
-          <p:cNvPr id="47" name="Picture 46" descr="image.png"/>
-          <p:cNvPicPr>
-            <a:picLocks noChangeAspect="1"/>
-          </p:cNvPicPr>
-          <p:nvPr/>
-        </p:nvPicPr>
-        <p:blipFill>
-          <a:blip r:embed="rId9"/>
-          <a:stretch>
-            <a:fillRect/>
-          </a:stretch>
-        </p:blipFill>
-        <p:spPr>
-          <a:xfrm>
-            <a:off x="6010275" y="3773090"/>
-            <a:ext cx="171450" cy="190500"/>
-          </a:xfrm>
-          <a:prstGeom prst="rect">
-            <a:avLst/>
-          </a:prstGeom>
-        </p:spPr>
-      </p:pic>
-      <p:pic>
-        <p:nvPicPr>
-          <p:cNvPr id="48" name="Picture 47" descr="image.png"/>
-          <p:cNvPicPr>
-            <a:picLocks noChangeAspect="1"/>
-          </p:cNvPicPr>
-          <p:nvPr/>
-        </p:nvPicPr>
-        <p:blipFill>
-          <a:blip r:embed="rId8"/>
-          <a:stretch>
-            <a:fillRect/>
-          </a:stretch>
-        </p:blipFill>
-        <p:spPr>
-          <a:xfrm>
-            <a:off x="6053137" y="4697015"/>
-            <a:ext cx="85725" cy="114300"/>
-          </a:xfrm>
-          <a:prstGeom prst="rect">
-            <a:avLst/>
-          </a:prstGeom>
-        </p:spPr>
-      </p:pic>
-      <p:pic>
-        <p:nvPicPr>
-          <p:cNvPr id="49" name="Picture 48" descr="image.png"/>
-          <p:cNvPicPr>
-            <a:picLocks noChangeAspect="1"/>
-          </p:cNvPicPr>
-          <p:nvPr/>
-        </p:nvPicPr>
-        <p:blipFill>
-          <a:blip r:embed="rId6"/>
-          <a:stretch>
-            <a:fillRect/>
-          </a:stretch>
-        </p:blipFill>
-        <p:spPr>
-          <a:xfrm>
-            <a:off x="6000750" y="5220890"/>
-            <a:ext cx="190500" cy="190500"/>
-          </a:xfrm>
-          <a:prstGeom prst="rect">
-            <a:avLst/>
-          </a:prstGeom>
-        </p:spPr>
-      </p:pic>
-      <p:pic>
-        <p:nvPicPr>
-          <p:cNvPr id="50" name="Picture 49" descr="image.png"/>
-          <p:cNvPicPr>
-            <a:picLocks noChangeAspect="1"/>
-          </p:cNvPicPr>
-          <p:nvPr/>
-        </p:nvPicPr>
-        <p:blipFill>
-          <a:blip r:embed="rId10"/>
-          <a:stretch>
-            <a:fillRect/>
-          </a:stretch>
-        </p:blipFill>
-        <p:spPr>
-          <a:xfrm>
-            <a:off x="9883824" y="3848546"/>
-            <a:ext cx="171450" cy="190500"/>
-          </a:xfrm>
-          <a:prstGeom prst="rect">
-            <a:avLst/>
-          </a:prstGeom>
-        </p:spPr>
-      </p:pic>
-      <p:pic>
-        <p:nvPicPr>
-          <p:cNvPr id="56" name="Picture 55" descr="image.png"/>
-          <p:cNvPicPr>
-            <a:picLocks noChangeAspect="1"/>
-          </p:cNvPicPr>
-          <p:nvPr/>
-        </p:nvPicPr>
-        <p:blipFill>
-          <a:blip r:embed="rId11"/>
-          <a:stretch>
-            <a:fillRect/>
-          </a:stretch>
-        </p:blipFill>
-        <p:spPr>
-          <a:xfrm>
-            <a:off x="8413849" y="2296417"/>
-            <a:ext cx="95250" cy="104775"/>
-          </a:xfrm>
-          <a:prstGeom prst="rect">
-            <a:avLst/>
-          </a:prstGeom>
-        </p:spPr>
-      </p:pic>
-      <p:pic>
-        <p:nvPicPr>
-          <p:cNvPr id="57" name="Picture 56" descr="image.png"/>
-          <p:cNvPicPr>
-            <a:picLocks noChangeAspect="1"/>
-          </p:cNvPicPr>
-          <p:nvPr/>
-        </p:nvPicPr>
-        <p:blipFill>
-          <a:blip r:embed="rId12"/>
-          <a:stretch>
-            <a:fillRect/>
-          </a:stretch>
-        </p:blipFill>
-        <p:spPr>
-          <a:xfrm>
-            <a:off x="9257109" y="2296417"/>
-            <a:ext cx="95250" cy="104775"/>
-          </a:xfrm>
-          <a:prstGeom prst="rect">
-            <a:avLst/>
-          </a:prstGeom>
-        </p:spPr>
-      </p:pic>
-      <p:pic>
-        <p:nvPicPr>
-          <p:cNvPr id="58" name="Picture 57" descr="image.png"/>
-          <p:cNvPicPr>
-            <a:picLocks noChangeAspect="1"/>
-          </p:cNvPicPr>
-          <p:nvPr/>
-        </p:nvPicPr>
-        <p:blipFill>
-          <a:blip r:embed="rId13"/>
-          <a:stretch>
-            <a:fillRect/>
-          </a:stretch>
-        </p:blipFill>
-        <p:spPr>
-          <a:xfrm>
-            <a:off x="10138469" y="2296417"/>
-            <a:ext cx="76200" cy="104775"/>
-          </a:xfrm>
-          <a:prstGeom prst="rect">
-            <a:avLst/>
-          </a:prstGeom>
-        </p:spPr>
-      </p:pic>
-      <p:pic>
-        <p:nvPicPr>
-          <p:cNvPr id="59" name="Picture 58" descr="image.png"/>
-          <p:cNvPicPr>
-            <a:picLocks noChangeAspect="1"/>
-          </p:cNvPicPr>
-          <p:nvPr/>
-        </p:nvPicPr>
-        <p:blipFill>
-          <a:blip r:embed="rId14"/>
-          <a:stretch>
-            <a:fillRect/>
-          </a:stretch>
-        </p:blipFill>
-        <p:spPr>
-          <a:xfrm>
-            <a:off x="10800754" y="2296417"/>
-            <a:ext cx="95250" cy="104775"/>
-          </a:xfrm>
-          <a:prstGeom prst="rect">
-            <a:avLst/>
-          </a:prstGeom>
-        </p:spPr>
-      </p:pic>
-      <p:pic>
-        <p:nvPicPr>
-          <p:cNvPr id="60" name="Picture 59" descr="image.png"/>
-          <p:cNvPicPr>
-            <a:picLocks noChangeAspect="1"/>
-          </p:cNvPicPr>
-          <p:nvPr/>
-        </p:nvPicPr>
-        <p:blipFill>
-          <a:blip r:embed="rId15"/>
-          <a:stretch>
-            <a:fillRect/>
-          </a:stretch>
-        </p:blipFill>
-        <p:spPr>
-          <a:xfrm>
-            <a:off x="8550324" y="2544067"/>
-            <a:ext cx="76200" cy="104775"/>
-          </a:xfrm>
-          <a:prstGeom prst="rect">
-            <a:avLst/>
-          </a:prstGeom>
-        </p:spPr>
-      </p:pic>
-      <p:pic>
-        <p:nvPicPr>
-          <p:cNvPr id="61" name="Picture 60" descr="image.png"/>
-          <p:cNvPicPr>
-            <a:picLocks noChangeAspect="1"/>
-          </p:cNvPicPr>
-          <p:nvPr/>
-        </p:nvPicPr>
-        <p:blipFill>
-          <a:blip r:embed="rId16"/>
-          <a:stretch>
-            <a:fillRect/>
-          </a:stretch>
-        </p:blipFill>
-        <p:spPr>
-          <a:xfrm>
-            <a:off x="9226599" y="2544067"/>
-            <a:ext cx="104775" cy="104775"/>
-          </a:xfrm>
-          <a:prstGeom prst="rect">
-            <a:avLst/>
-          </a:prstGeom>
-        </p:spPr>
-      </p:pic>
-      <p:pic>
-        <p:nvPicPr>
-          <p:cNvPr id="62" name="Picture 61" descr="image.png"/>
-          <p:cNvPicPr>
-            <a:picLocks noChangeAspect="1"/>
-          </p:cNvPicPr>
-          <p:nvPr/>
-        </p:nvPicPr>
-        <p:blipFill>
-          <a:blip r:embed="rId17"/>
-          <a:stretch>
-            <a:fillRect/>
-          </a:stretch>
-        </p:blipFill>
-        <p:spPr>
-          <a:xfrm>
-            <a:off x="10360074" y="2544067"/>
-            <a:ext cx="104775" cy="104775"/>
-          </a:xfrm>
-          <a:prstGeom prst="rect">
-            <a:avLst/>
-          </a:prstGeom>
-        </p:spPr>
-      </p:pic>
-      <p:sp>
-        <p:nvSpPr>
           <p:cNvPr id="63" name="TextBox 62"/>
           <p:cNvSpPr txBox="1"/>
           <p:nvPr/>
@@ -25037,1162 +23054,1930 @@
           </a:p>
         </p:txBody>
       </p:sp>
-      <p:sp>
-        <p:nvSpPr>
-          <p:cNvPr id="65" name="TextBox 64"/>
-          <p:cNvSpPr txBox="1"/>
+      <p:grpSp>
+        <p:nvGrpSpPr>
+          <p:cNvPr id="21" name="Agrupar 20">
+            <a:extLst>
+              <a:ext uri="{FF2B5EF4-FFF2-40B4-BE49-F238E27FC236}">
+                <a16:creationId xmlns:a16="http://schemas.microsoft.com/office/drawing/2014/main" id="{6F18CAC1-8458-4251-809D-7FC3264EFE8D}"/>
+              </a:ext>
+            </a:extLst>
+          </p:cNvPr>
+          <p:cNvGrpSpPr/>
           <p:nvPr/>
-        </p:nvSpPr>
-        <p:spPr>
+        </p:nvGrpSpPr>
+        <p:grpSpPr>
           <a:xfrm>
-            <a:off x="800100" y="1101030"/>
-            <a:ext cx="3197274" cy="190500"/>
+            <a:off x="1703264" y="883143"/>
+            <a:ext cx="3683049" cy="4332094"/>
+            <a:chOff x="381000" y="977206"/>
+            <a:chExt cx="3683049" cy="4332094"/>
           </a:xfrm>
-          <a:prstGeom prst="rect">
-            <a:avLst/>
-          </a:prstGeom>
-          <a:noFill/>
-        </p:spPr>
-        <p:txBody>
-          <a:bodyPr wrap="square" lIns="0" tIns="0" rIns="0" bIns="0" anchor="ctr">
-            <a:spAutoFit/>
-          </a:bodyPr>
-          <a:lstStyle/>
-          <a:p>
-            <a:pPr algn="l"/>
-            <a:r>
-              <a:rPr sz="1275" b="1" i="0" u="none">
+        </p:grpSpPr>
+        <p:sp>
+          <p:nvSpPr>
+            <p:cNvPr id="7" name="Rectangle 6"/>
+            <p:cNvSpPr/>
+            <p:nvPr/>
+          </p:nvSpPr>
+          <p:spPr>
+            <a:xfrm>
+              <a:off x="390525" y="1901131"/>
+              <a:ext cx="3663999" cy="3408168"/>
+            </a:xfrm>
+            <a:prstGeom prst="rect">
+              <a:avLst/>
+            </a:prstGeom>
+            <a:solidFill>
+              <a:srgbClr val="F1F5F9"/>
+            </a:solidFill>
+            <a:ln>
+              <a:noFill/>
+            </a:ln>
+            <a:effectLst/>
+          </p:spPr>
+          <p:style>
+            <a:lnRef idx="1">
+              <a:schemeClr val="accent1"/>
+            </a:lnRef>
+            <a:fillRef idx="3">
+              <a:schemeClr val="accent1"/>
+            </a:fillRef>
+            <a:effectRef idx="2">
+              <a:schemeClr val="accent1"/>
+            </a:effectRef>
+            <a:fontRef idx="minor">
+              <a:schemeClr val="lt1"/>
+            </a:fontRef>
+          </p:style>
+          <p:txBody>
+            <a:bodyPr rtlCol="0" anchor="ctr"/>
+            <a:lstStyle/>
+            <a:p>
+              <a:pPr algn="ctr"/>
+              <a:endParaRPr/>
+            </a:p>
+          </p:txBody>
+        </p:sp>
+        <p:sp>
+          <p:nvSpPr>
+            <p:cNvPr id="2" name="Rounded Rectangle 1"/>
+            <p:cNvSpPr/>
+            <p:nvPr/>
+          </p:nvSpPr>
+          <p:spPr>
+            <a:xfrm>
+              <a:off x="381000" y="977206"/>
+              <a:ext cx="3683049" cy="4332094"/>
+            </a:xfrm>
+            <a:prstGeom prst="roundRect">
+              <a:avLst>
+                <a:gd name="adj" fmla="val 3103"/>
+              </a:avLst>
+            </a:prstGeom>
+            <a:solidFill>
+              <a:srgbClr val="F8FAFC"/>
+            </a:solidFill>
+            <a:ln w="9525">
+              <a:solidFill>
+                <a:srgbClr val="E2E8F0"/>
+              </a:solidFill>
+            </a:ln>
+            <a:effectLst/>
+          </p:spPr>
+          <p:style>
+            <a:lnRef idx="1">
+              <a:schemeClr val="accent1"/>
+            </a:lnRef>
+            <a:fillRef idx="3">
+              <a:schemeClr val="accent1"/>
+            </a:fillRef>
+            <a:effectRef idx="2">
+              <a:schemeClr val="accent1"/>
+            </a:effectRef>
+            <a:fontRef idx="minor">
+              <a:schemeClr val="lt1"/>
+            </a:fontRef>
+          </p:style>
+          <p:txBody>
+            <a:bodyPr rtlCol="0" anchor="ctr"/>
+            <a:lstStyle/>
+            <a:p>
+              <a:pPr algn="ctr"/>
+              <a:endParaRPr/>
+            </a:p>
+          </p:txBody>
+        </p:sp>
+        <p:sp>
+          <p:nvSpPr>
+            <p:cNvPr id="5" name="Rectangle 4"/>
+            <p:cNvSpPr/>
+            <p:nvPr/>
+          </p:nvSpPr>
+          <p:spPr>
+            <a:xfrm>
+              <a:off x="390525" y="986730"/>
+              <a:ext cx="3663999" cy="419100"/>
+            </a:xfrm>
+            <a:prstGeom prst="rect">
+              <a:avLst/>
+            </a:prstGeom>
+            <a:solidFill>
+              <a:srgbClr val="1F3A5F"/>
+            </a:solidFill>
+            <a:ln>
+              <a:noFill/>
+            </a:ln>
+            <a:effectLst/>
+          </p:spPr>
+          <p:style>
+            <a:lnRef idx="1">
+              <a:schemeClr val="accent1"/>
+            </a:lnRef>
+            <a:fillRef idx="3">
+              <a:schemeClr val="accent1"/>
+            </a:fillRef>
+            <a:effectRef idx="2">
+              <a:schemeClr val="accent1"/>
+            </a:effectRef>
+            <a:fontRef idx="minor">
+              <a:schemeClr val="lt1"/>
+            </a:fontRef>
+          </p:style>
+          <p:txBody>
+            <a:bodyPr rtlCol="0" anchor="ctr"/>
+            <a:lstStyle/>
+            <a:p>
+              <a:pPr algn="ctr"/>
+              <a:endParaRPr/>
+            </a:p>
+          </p:txBody>
+        </p:sp>
+        <p:sp>
+          <p:nvSpPr>
+            <p:cNvPr id="6" name="Rectangle 5"/>
+            <p:cNvSpPr/>
+            <p:nvPr/>
+          </p:nvSpPr>
+          <p:spPr>
+            <a:xfrm>
+              <a:off x="390525" y="1405830"/>
+              <a:ext cx="3663999" cy="495300"/>
+            </a:xfrm>
+            <a:prstGeom prst="rect">
+              <a:avLst/>
+            </a:prstGeom>
+            <a:solidFill>
+              <a:srgbClr val="FFFFFF"/>
+            </a:solidFill>
+            <a:ln>
+              <a:noFill/>
+            </a:ln>
+            <a:effectLst/>
+          </p:spPr>
+          <p:style>
+            <a:lnRef idx="1">
+              <a:schemeClr val="accent1"/>
+            </a:lnRef>
+            <a:fillRef idx="3">
+              <a:schemeClr val="accent1"/>
+            </a:fillRef>
+            <a:effectRef idx="2">
+              <a:schemeClr val="accent1"/>
+            </a:effectRef>
+            <a:fontRef idx="minor">
+              <a:schemeClr val="lt1"/>
+            </a:fontRef>
+          </p:style>
+          <p:txBody>
+            <a:bodyPr rtlCol="0" anchor="ctr"/>
+            <a:lstStyle/>
+            <a:p>
+              <a:pPr algn="ctr"/>
+              <a:endParaRPr/>
+            </a:p>
+          </p:txBody>
+        </p:sp>
+        <p:sp>
+          <p:nvSpPr>
+            <p:cNvPr id="8" name="Rectangle 7"/>
+            <p:cNvSpPr/>
+            <p:nvPr/>
+          </p:nvSpPr>
+          <p:spPr>
+            <a:xfrm>
+              <a:off x="390525" y="1891605"/>
+              <a:ext cx="3663999" cy="9525"/>
+            </a:xfrm>
+            <a:prstGeom prst="rect">
+              <a:avLst/>
+            </a:prstGeom>
+            <a:solidFill>
+              <a:srgbClr val="E2E8F0"/>
+            </a:solidFill>
+            <a:ln>
+              <a:noFill/>
+            </a:ln>
+            <a:effectLst/>
+          </p:spPr>
+          <p:style>
+            <a:lnRef idx="1">
+              <a:schemeClr val="accent1"/>
+            </a:lnRef>
+            <a:fillRef idx="3">
+              <a:schemeClr val="accent1"/>
+            </a:fillRef>
+            <a:effectRef idx="2">
+              <a:schemeClr val="accent1"/>
+            </a:effectRef>
+            <a:fontRef idx="minor">
+              <a:schemeClr val="lt1"/>
+            </a:fontRef>
+          </p:style>
+          <p:txBody>
+            <a:bodyPr rtlCol="0" anchor="ctr"/>
+            <a:lstStyle/>
+            <a:p>
+              <a:pPr algn="ctr"/>
+              <a:endParaRPr/>
+            </a:p>
+          </p:txBody>
+        </p:sp>
+        <p:sp>
+          <p:nvSpPr>
+            <p:cNvPr id="65" name="TextBox 64"/>
+            <p:cNvSpPr txBox="1"/>
+            <p:nvPr/>
+          </p:nvSpPr>
+          <p:spPr>
+            <a:xfrm>
+              <a:off x="800100" y="1101030"/>
+              <a:ext cx="3197274" cy="190500"/>
+            </a:xfrm>
+            <a:prstGeom prst="rect">
+              <a:avLst/>
+            </a:prstGeom>
+            <a:noFill/>
+          </p:spPr>
+          <p:txBody>
+            <a:bodyPr wrap="square" lIns="0" tIns="0" rIns="0" bIns="0" anchor="ctr">
+              <a:spAutoFit/>
+            </a:bodyPr>
+            <a:lstStyle/>
+            <a:p>
+              <a:pPr algn="l"/>
+              <a:r>
+                <a:rPr sz="1275" b="1" i="0" u="none" dirty="0">
+                  <a:solidFill>
+                    <a:srgbClr val="FFFFFF"/>
+                  </a:solidFill>
+                  <a:latin typeface="Inter"/>
+                </a:rPr>
+                <a:t>Consulta </a:t>
+              </a:r>
+              <a:r>
+                <a:rPr sz="1275" b="1" i="0" u="none" dirty="0" err="1">
+                  <a:solidFill>
+                    <a:srgbClr val="FFFFFF"/>
+                  </a:solidFill>
+                  <a:latin typeface="Inter"/>
+                </a:rPr>
+                <a:t>gerencial</a:t>
+              </a:r>
+              <a:endParaRPr sz="1275" b="1" i="0" u="none" dirty="0">
                 <a:solidFill>
                   <a:srgbClr val="FFFFFF"/>
                 </a:solidFill>
                 <a:latin typeface="Inter"/>
-              </a:rPr>
-              <a:t>Consulta gerencial</a:t>
-            </a:r>
-          </a:p>
-        </p:txBody>
-      </p:sp>
-      <p:sp>
-        <p:nvSpPr>
-          <p:cNvPr id="66" name="TextBox 65"/>
-          <p:cNvSpPr txBox="1"/>
-          <p:nvPr/>
-        </p:nvSpPr>
-        <p:spPr>
-          <a:xfrm>
-            <a:off x="542925" y="1520130"/>
-            <a:ext cx="3454449" cy="266700"/>
-          </a:xfrm>
-          <a:prstGeom prst="rect">
-            <a:avLst/>
-          </a:prstGeom>
-          <a:noFill/>
-        </p:spPr>
-        <p:txBody>
-          <a:bodyPr wrap="square" lIns="0" tIns="0" rIns="0" bIns="0" anchor="ctr">
-            <a:spAutoFit/>
-          </a:bodyPr>
-          <a:lstStyle/>
-          <a:p>
-            <a:pPr algn="l">
-              <a:lnSpc>
-                <a:spcPts val="1518"/>
-              </a:lnSpc>
-            </a:pPr>
-            <a:r>
-              <a:rPr sz="1125" b="1" i="0" u="none">
+              </a:endParaRPr>
+            </a:p>
+          </p:txBody>
+        </p:sp>
+        <p:sp>
+          <p:nvSpPr>
+            <p:cNvPr id="66" name="TextBox 65"/>
+            <p:cNvSpPr txBox="1"/>
+            <p:nvPr/>
+          </p:nvSpPr>
+          <p:spPr>
+            <a:xfrm>
+              <a:off x="542925" y="1520130"/>
+              <a:ext cx="3454449" cy="266700"/>
+            </a:xfrm>
+            <a:prstGeom prst="rect">
+              <a:avLst/>
+            </a:prstGeom>
+            <a:noFill/>
+          </p:spPr>
+          <p:txBody>
+            <a:bodyPr wrap="square" lIns="0" tIns="0" rIns="0" bIns="0" anchor="ctr">
+              <a:spAutoFit/>
+            </a:bodyPr>
+            <a:lstStyle/>
+            <a:p>
+              <a:pPr algn="l">
+                <a:lnSpc>
+                  <a:spcPts val="1518"/>
+                </a:lnSpc>
+              </a:pPr>
+              <a:r>
+                <a:rPr sz="1125" b="1" i="0" u="none" dirty="0" err="1">
+                  <a:solidFill>
+                    <a:srgbClr val="334155"/>
+                  </a:solidFill>
+                  <a:latin typeface="Inter"/>
+                </a:rPr>
+                <a:t>Quais</a:t>
+              </a:r>
+              <a:r>
+                <a:rPr sz="1125" b="1" i="0" u="none" dirty="0">
+                  <a:solidFill>
+                    <a:srgbClr val="334155"/>
+                  </a:solidFill>
+                  <a:latin typeface="Inter"/>
+                </a:rPr>
+                <a:t> </a:t>
+              </a:r>
+              <a:r>
+                <a:rPr sz="1125" b="1" i="0" u="none" dirty="0" err="1">
+                  <a:solidFill>
+                    <a:srgbClr val="334155"/>
+                  </a:solidFill>
+                  <a:latin typeface="Inter"/>
+                </a:rPr>
+                <a:t>salas</a:t>
+              </a:r>
+              <a:r>
+                <a:rPr sz="1125" b="1" i="0" u="none" dirty="0">
+                  <a:solidFill>
+                    <a:srgbClr val="334155"/>
+                  </a:solidFill>
+                  <a:latin typeface="Inter"/>
+                </a:rPr>
+                <a:t> </a:t>
+              </a:r>
+              <a:r>
+                <a:rPr sz="1125" b="1" i="0" u="none" dirty="0" err="1">
+                  <a:solidFill>
+                    <a:srgbClr val="334155"/>
+                  </a:solidFill>
+                  <a:latin typeface="Inter"/>
+                </a:rPr>
+                <a:t>geram</a:t>
+              </a:r>
+              <a:r>
+                <a:rPr sz="1125" b="1" i="0" u="none" dirty="0">
+                  <a:solidFill>
+                    <a:srgbClr val="334155"/>
+                  </a:solidFill>
+                  <a:latin typeface="Inter"/>
+                </a:rPr>
+                <a:t> </a:t>
+              </a:r>
+              <a:r>
+                <a:rPr sz="1125" b="1" i="0" u="none" dirty="0" err="1">
+                  <a:solidFill>
+                    <a:srgbClr val="334155"/>
+                  </a:solidFill>
+                  <a:latin typeface="Inter"/>
+                </a:rPr>
+                <a:t>mais</a:t>
+              </a:r>
+              <a:r>
+                <a:rPr sz="1125" b="1" i="0" u="none" dirty="0">
+                  <a:solidFill>
+                    <a:srgbClr val="334155"/>
+                  </a:solidFill>
+                  <a:latin typeface="Inter"/>
+                </a:rPr>
+                <a:t> </a:t>
+              </a:r>
+              <a:r>
+                <a:rPr sz="1125" b="1" i="0" u="none" dirty="0" err="1">
+                  <a:solidFill>
+                    <a:srgbClr val="334155"/>
+                  </a:solidFill>
+                  <a:latin typeface="Inter"/>
+                </a:rPr>
+                <a:t>receita</a:t>
+              </a:r>
+              <a:r>
+                <a:rPr sz="1125" b="1" i="0" u="none" dirty="0">
+                  <a:solidFill>
+                    <a:srgbClr val="334155"/>
+                  </a:solidFill>
+                  <a:latin typeface="Inter"/>
+                </a:rPr>
+                <a:t>?</a:t>
+              </a:r>
+            </a:p>
+          </p:txBody>
+        </p:sp>
+        <p:grpSp>
+          <p:nvGrpSpPr>
+            <p:cNvPr id="15" name="Agrupar 14">
+              <a:extLst>
+                <a:ext uri="{FF2B5EF4-FFF2-40B4-BE49-F238E27FC236}">
+                  <a16:creationId xmlns:a16="http://schemas.microsoft.com/office/drawing/2014/main" id="{3112711C-2467-4189-93F9-6EFE963F97A1}"/>
+                </a:ext>
+              </a:extLst>
+            </p:cNvPr>
+            <p:cNvGrpSpPr/>
+            <p:nvPr/>
+          </p:nvGrpSpPr>
+          <p:grpSpPr>
+            <a:xfrm>
+              <a:off x="523875" y="1115317"/>
+              <a:ext cx="3405530" cy="4105573"/>
+              <a:chOff x="523875" y="1115317"/>
+              <a:chExt cx="3405530" cy="4105573"/>
+            </a:xfrm>
+          </p:grpSpPr>
+          <p:sp>
+            <p:nvSpPr>
+              <p:cNvPr id="99" name="Rounded Rectangle 22">
+                <a:extLst>
+                  <a:ext uri="{FF2B5EF4-FFF2-40B4-BE49-F238E27FC236}">
+                    <a16:creationId xmlns:a16="http://schemas.microsoft.com/office/drawing/2014/main" id="{F1F71F69-6C46-46D9-A40B-955714EAB1FF}"/>
+                  </a:ext>
+                </a:extLst>
+              </p:cNvPr>
+              <p:cNvSpPr/>
+              <p:nvPr/>
+            </p:nvSpPr>
+            <p:spPr>
+              <a:xfrm>
+                <a:off x="532106" y="3955902"/>
+                <a:ext cx="3397299" cy="1264988"/>
+              </a:xfrm>
+              <a:prstGeom prst="roundRect">
+                <a:avLst>
+                  <a:gd name="adj" fmla="val 4036"/>
+                </a:avLst>
+              </a:prstGeom>
+              <a:solidFill>
+                <a:srgbClr val="FFFFFF"/>
+              </a:solidFill>
+              <a:ln w="19050">
                 <a:solidFill>
-                  <a:srgbClr val="334155"/>
+                  <a:srgbClr val="CBD5E1"/>
                 </a:solidFill>
-                <a:latin typeface="Inter"/>
-              </a:rPr>
-              <a:t>Quais salas geram mais receita?</a:t>
-            </a:r>
-          </a:p>
-        </p:txBody>
-      </p:sp>
-      <p:sp>
-        <p:nvSpPr>
-          <p:cNvPr id="68" name="TextBox 67"/>
-          <p:cNvSpPr txBox="1"/>
-          <p:nvPr/>
-        </p:nvSpPr>
-        <p:spPr>
-          <a:xfrm>
-            <a:off x="4673649" y="1101030"/>
-            <a:ext cx="3197274" cy="190500"/>
-          </a:xfrm>
-          <a:prstGeom prst="rect">
-            <a:avLst/>
-          </a:prstGeom>
-          <a:noFill/>
-        </p:spPr>
-        <p:txBody>
-          <a:bodyPr wrap="square" lIns="0" tIns="0" rIns="0" bIns="0" anchor="ctr">
-            <a:spAutoFit/>
-          </a:bodyPr>
-          <a:lstStyle/>
-          <a:p>
-            <a:pPr algn="l"/>
-            <a:r>
-              <a:rPr sz="1275" b="1" i="0" u="none">
+              </a:ln>
+              <a:effectLst/>
+            </p:spPr>
+            <p:style>
+              <a:lnRef idx="1">
+                <a:schemeClr val="accent1"/>
+              </a:lnRef>
+              <a:fillRef idx="3">
+                <a:schemeClr val="accent1"/>
+              </a:fillRef>
+              <a:effectRef idx="2">
+                <a:schemeClr val="accent1"/>
+              </a:effectRef>
+              <a:fontRef idx="minor">
+                <a:schemeClr val="lt1"/>
+              </a:fontRef>
+            </p:style>
+            <p:txBody>
+              <a:bodyPr rtlCol="0" anchor="ctr"/>
+              <a:lstStyle/>
+              <a:p>
+                <a:pPr algn="ctr"/>
+                <a:endParaRPr/>
+              </a:p>
+            </p:txBody>
+          </p:sp>
+          <p:sp>
+            <p:nvSpPr>
+              <p:cNvPr id="23" name="Rounded Rectangle 22"/>
+              <p:cNvSpPr/>
+              <p:nvPr/>
+            </p:nvSpPr>
+            <p:spPr>
+              <a:xfrm>
+                <a:off x="523875" y="2034480"/>
+                <a:ext cx="3397299" cy="1887884"/>
+              </a:xfrm>
+              <a:prstGeom prst="roundRect">
+                <a:avLst>
+                  <a:gd name="adj" fmla="val 4036"/>
+                </a:avLst>
+              </a:prstGeom>
+              <a:solidFill>
+                <a:srgbClr val="FFFFFF"/>
+              </a:solidFill>
+              <a:ln w="19050">
                 <a:solidFill>
-                  <a:srgbClr val="FFFFFF"/>
+                  <a:srgbClr val="CBD5E1"/>
                 </a:solidFill>
-                <a:latin typeface="Inter"/>
-              </a:rPr>
-              <a:t>Integridade: restrição funcionando</a:t>
-            </a:r>
-          </a:p>
-        </p:txBody>
-      </p:sp>
-      <p:sp>
-        <p:nvSpPr>
-          <p:cNvPr id="69" name="TextBox 68"/>
-          <p:cNvSpPr txBox="1"/>
-          <p:nvPr/>
-        </p:nvSpPr>
-        <p:spPr>
-          <a:xfrm>
-            <a:off x="4416474" y="1520130"/>
-            <a:ext cx="3454449" cy="376535"/>
-          </a:xfrm>
-          <a:prstGeom prst="rect">
-            <a:avLst/>
-          </a:prstGeom>
-          <a:noFill/>
-        </p:spPr>
-        <p:txBody>
-          <a:bodyPr wrap="square" lIns="0" tIns="0" rIns="0" bIns="0" anchor="ctr">
-            <a:spAutoFit/>
-          </a:bodyPr>
-          <a:lstStyle/>
-          <a:p>
-            <a:pPr algn="l">
-              <a:lnSpc>
-                <a:spcPts val="1518"/>
-              </a:lnSpc>
-            </a:pPr>
-            <a:r>
-              <a:rPr sz="1125" b="1" i="0" u="none">
-                <a:solidFill>
-                  <a:srgbClr val="334155"/>
-                </a:solidFill>
-                <a:latin typeface="Inter"/>
-              </a:rPr>
-              <a:t>O banco impede cancelar uma reserva sem motivo?</a:t>
-            </a:r>
-          </a:p>
-        </p:txBody>
-      </p:sp>
-      <p:sp>
-        <p:nvSpPr>
-          <p:cNvPr id="71" name="TextBox 70"/>
-          <p:cNvSpPr txBox="1"/>
-          <p:nvPr/>
-        </p:nvSpPr>
-        <p:spPr>
-          <a:xfrm>
-            <a:off x="8566249" y="1101030"/>
-            <a:ext cx="3178224" cy="190500"/>
-          </a:xfrm>
-          <a:prstGeom prst="rect">
-            <a:avLst/>
-          </a:prstGeom>
-          <a:noFill/>
-        </p:spPr>
-        <p:txBody>
-          <a:bodyPr wrap="square" lIns="0" tIns="0" rIns="0" bIns="0" anchor="ctr">
-            <a:spAutoFit/>
-          </a:bodyPr>
-          <a:lstStyle/>
-          <a:p>
-            <a:pPr algn="l"/>
-            <a:r>
-              <a:rPr sz="1275" b="1" i="0" u="none">
-                <a:solidFill>
-                  <a:srgbClr val="FFFFFF"/>
-                </a:solidFill>
-                <a:latin typeface="Inter"/>
-              </a:rPr>
-              <a:t>Relacionamento importante</a:t>
-            </a:r>
-          </a:p>
-        </p:txBody>
-      </p:sp>
-      <p:sp>
-        <p:nvSpPr>
-          <p:cNvPr id="72" name="TextBox 71"/>
-          <p:cNvSpPr txBox="1"/>
-          <p:nvPr/>
-        </p:nvSpPr>
-        <p:spPr>
-          <a:xfrm>
-            <a:off x="8290024" y="1520130"/>
-            <a:ext cx="3454449" cy="395287"/>
-          </a:xfrm>
-          <a:prstGeom prst="rect">
-            <a:avLst/>
-          </a:prstGeom>
-          <a:noFill/>
-        </p:spPr>
-        <p:txBody>
-          <a:bodyPr wrap="square" lIns="0" tIns="0" rIns="0" bIns="0" anchor="ctr">
-            <a:spAutoFit/>
-          </a:bodyPr>
-          <a:lstStyle/>
-          <a:p>
-            <a:pPr algn="l">
-              <a:lnSpc>
-                <a:spcPts val="1518"/>
-              </a:lnSpc>
-            </a:pPr>
-            <a:r>
-              <a:rPr sz="1125" b="1" i="0" u="none">
-                <a:solidFill>
-                  <a:srgbClr val="334155"/>
-                </a:solidFill>
-                <a:latin typeface="Inter"/>
-              </a:rPr>
-              <a:t>Como a reserva se liga a cliente, proprietário, manutenção e custo?</a:t>
-            </a:r>
-          </a:p>
-        </p:txBody>
-      </p:sp>
-      <p:sp>
-        <p:nvSpPr>
-          <p:cNvPr id="74" name="TextBox 73"/>
-          <p:cNvSpPr txBox="1"/>
-          <p:nvPr/>
-        </p:nvSpPr>
-        <p:spPr>
-          <a:xfrm>
-            <a:off x="4397424" y="2160790"/>
-            <a:ext cx="1390650" cy="138499"/>
-          </a:xfrm>
-          <a:prstGeom prst="rect">
-            <a:avLst/>
-          </a:prstGeom>
-          <a:noFill/>
-        </p:spPr>
-        <p:txBody>
-          <a:bodyPr wrap="square" lIns="0" tIns="0" rIns="0" bIns="0" anchor="ctr">
-            <a:spAutoFit/>
-          </a:bodyPr>
-          <a:lstStyle/>
-          <a:p>
-            <a:pPr algn="l"/>
-            <a:r>
-              <a:rPr lang="pt-BR" sz="900" b="1" i="0" u="none" dirty="0">
-                <a:solidFill>
-                  <a:srgbClr val="475569"/>
-                </a:solidFill>
-                <a:latin typeface="Inter"/>
-              </a:rPr>
-              <a:t>     - </a:t>
-            </a:r>
-            <a:r>
-              <a:rPr sz="900" b="1" i="0" u="none" dirty="0">
-                <a:solidFill>
-                  <a:srgbClr val="475569"/>
-                </a:solidFill>
-                <a:latin typeface="Inter"/>
-              </a:rPr>
-              <a:t>TESTE COM ERRO</a:t>
-            </a:r>
-          </a:p>
-        </p:txBody>
-      </p:sp>
-      <p:sp>
-        <p:nvSpPr>
-          <p:cNvPr id="75" name="TextBox 74"/>
-          <p:cNvSpPr txBox="1"/>
-          <p:nvPr/>
-        </p:nvSpPr>
-        <p:spPr>
-          <a:xfrm>
-            <a:off x="4397424" y="3446665"/>
-            <a:ext cx="1428750" cy="138499"/>
-          </a:xfrm>
-          <a:prstGeom prst="rect">
-            <a:avLst/>
-          </a:prstGeom>
-          <a:noFill/>
-        </p:spPr>
-        <p:txBody>
-          <a:bodyPr wrap="square" lIns="0" tIns="0" rIns="0" bIns="0" anchor="ctr">
-            <a:spAutoFit/>
-          </a:bodyPr>
-          <a:lstStyle/>
-          <a:p>
-            <a:pPr algn="l"/>
-            <a:r>
-              <a:rPr lang="pt-BR" sz="900" b="1" i="0" u="none" dirty="0">
-                <a:solidFill>
-                  <a:srgbClr val="475569"/>
-                </a:solidFill>
-                <a:latin typeface="Inter"/>
-              </a:rPr>
-              <a:t>     - </a:t>
-            </a:r>
-            <a:r>
-              <a:rPr sz="900" b="1" i="0" u="none" dirty="0">
-                <a:solidFill>
-                  <a:srgbClr val="475569"/>
-                </a:solidFill>
-                <a:latin typeface="Inter"/>
-              </a:rPr>
-              <a:t>UPDATE CORRETO</a:t>
-            </a:r>
-          </a:p>
-        </p:txBody>
-      </p:sp>
-      <p:sp>
-        <p:nvSpPr>
-          <p:cNvPr id="76" name="TextBox 75"/>
-          <p:cNvSpPr txBox="1"/>
-          <p:nvPr/>
-        </p:nvSpPr>
-        <p:spPr>
-          <a:xfrm>
-            <a:off x="4397424" y="4894465"/>
-            <a:ext cx="1052512" cy="138499"/>
-          </a:xfrm>
-          <a:prstGeom prst="rect">
-            <a:avLst/>
-          </a:prstGeom>
-          <a:noFill/>
-        </p:spPr>
-        <p:txBody>
-          <a:bodyPr wrap="square" lIns="0" tIns="0" rIns="0" bIns="0" anchor="ctr">
-            <a:spAutoFit/>
-          </a:bodyPr>
-          <a:lstStyle/>
-          <a:p>
-            <a:pPr algn="l"/>
-            <a:r>
-              <a:rPr lang="pt-BR" sz="900" b="1" i="0" u="none" dirty="0">
-                <a:solidFill>
-                  <a:srgbClr val="475569"/>
-                </a:solidFill>
-                <a:latin typeface="Inter"/>
-              </a:rPr>
-              <a:t>     - </a:t>
-            </a:r>
-            <a:r>
-              <a:rPr sz="900" b="1" i="0" u="none" dirty="0">
-                <a:solidFill>
-                  <a:srgbClr val="475569"/>
-                </a:solidFill>
-                <a:latin typeface="Inter"/>
-              </a:rPr>
-              <a:t>RESULTADO</a:t>
-            </a:r>
-          </a:p>
-        </p:txBody>
-      </p:sp>
-      <p:sp>
-        <p:nvSpPr>
-          <p:cNvPr id="77" name="TextBox 76"/>
-          <p:cNvSpPr txBox="1"/>
-          <p:nvPr/>
-        </p:nvSpPr>
-        <p:spPr>
-          <a:xfrm>
-            <a:off x="523875" y="2940248"/>
-            <a:ext cx="3397299" cy="323850"/>
-          </a:xfrm>
-          <a:prstGeom prst="rect">
-            <a:avLst/>
-          </a:prstGeom>
-          <a:noFill/>
-        </p:spPr>
-        <p:txBody>
-          <a:bodyPr wrap="square" lIns="0" tIns="0" rIns="0" bIns="0" anchor="t">
-            <a:spAutoFit/>
-          </a:bodyPr>
-          <a:lstStyle/>
-          <a:p>
-            <a:pPr algn="ctr"/>
-            <a:r>
-              <a:rPr sz="975" b="1" i="0" u="none">
-                <a:solidFill>
-                  <a:srgbClr val="475569"/>
-                </a:solidFill>
-                <a:latin typeface="JetBrains Mono"/>
-              </a:rPr>
-              <a:t>[INSERIR PRINT: consulta SQL do faturamento por sala e mês]</a:t>
-            </a:r>
-          </a:p>
-        </p:txBody>
-      </p:sp>
-      <p:sp>
-        <p:nvSpPr>
-          <p:cNvPr id="79" name="TextBox 78"/>
-          <p:cNvSpPr txBox="1"/>
-          <p:nvPr/>
-        </p:nvSpPr>
-        <p:spPr>
-          <a:xfrm>
-            <a:off x="4254549" y="2144315"/>
-            <a:ext cx="457200" cy="171450"/>
-          </a:xfrm>
-          <a:prstGeom prst="rect">
-            <a:avLst/>
-          </a:prstGeom>
-          <a:noFill/>
-        </p:spPr>
-        <p:txBody>
-          <a:bodyPr wrap="square" lIns="0" tIns="0" rIns="0" bIns="0" anchor="ctr">
-            <a:spAutoFit/>
-          </a:bodyPr>
-          <a:lstStyle/>
-          <a:p>
-            <a:pPr algn="ctr"/>
-            <a:r>
-              <a:rPr sz="825" b="1" i="0" u="none">
-                <a:solidFill>
-                  <a:srgbClr val="1E293B"/>
-                </a:solidFill>
-                <a:latin typeface="Inter"/>
-              </a:rPr>
-              <a:t>1</a:t>
-            </a:r>
-          </a:p>
-        </p:txBody>
-      </p:sp>
-      <p:sp>
-        <p:nvSpPr>
-          <p:cNvPr id="80" name="TextBox 79"/>
-          <p:cNvSpPr txBox="1"/>
-          <p:nvPr/>
-        </p:nvSpPr>
-        <p:spPr>
-          <a:xfrm>
-            <a:off x="4397424" y="2734865"/>
-            <a:ext cx="3397299" cy="323850"/>
-          </a:xfrm>
-          <a:prstGeom prst="rect">
-            <a:avLst/>
-          </a:prstGeom>
-          <a:noFill/>
-        </p:spPr>
-        <p:txBody>
-          <a:bodyPr wrap="square" lIns="0" tIns="0" rIns="0" bIns="0" anchor="t">
-            <a:spAutoFit/>
-          </a:bodyPr>
-          <a:lstStyle/>
-          <a:p>
-            <a:pPr algn="ctr"/>
-            <a:r>
-              <a:rPr sz="975" b="1" i="0" u="none">
-                <a:solidFill>
-                  <a:srgbClr val="B91C1C"/>
-                </a:solidFill>
-                <a:latin typeface="JetBrains Mono"/>
-              </a:rPr>
-              <a:t>[INSERIR PRINT: UPDATE sem data e motivo e a mensagem de erro de CHECK]</a:t>
-            </a:r>
-          </a:p>
-        </p:txBody>
-      </p:sp>
-      <p:sp>
-        <p:nvSpPr>
-          <p:cNvPr id="81" name="TextBox 80"/>
-          <p:cNvSpPr txBox="1"/>
-          <p:nvPr/>
-        </p:nvSpPr>
-        <p:spPr>
-          <a:xfrm>
-            <a:off x="4254549" y="3430190"/>
-            <a:ext cx="457200" cy="171450"/>
-          </a:xfrm>
-          <a:prstGeom prst="rect">
-            <a:avLst/>
-          </a:prstGeom>
-          <a:noFill/>
-        </p:spPr>
-        <p:txBody>
-          <a:bodyPr wrap="square" lIns="0" tIns="0" rIns="0" bIns="0" anchor="ctr">
-            <a:spAutoFit/>
-          </a:bodyPr>
-          <a:lstStyle/>
-          <a:p>
-            <a:pPr algn="ctr"/>
-            <a:r>
-              <a:rPr sz="825" b="1" i="0" u="none">
-                <a:solidFill>
-                  <a:srgbClr val="1E293B"/>
-                </a:solidFill>
-                <a:latin typeface="Inter"/>
-              </a:rPr>
-              <a:t>2</a:t>
-            </a:r>
-          </a:p>
-        </p:txBody>
-      </p:sp>
-      <p:sp>
-        <p:nvSpPr>
-          <p:cNvPr id="82" name="TextBox 81"/>
-          <p:cNvSpPr txBox="1"/>
-          <p:nvPr/>
-        </p:nvSpPr>
-        <p:spPr>
-          <a:xfrm>
-            <a:off x="4397424" y="4020740"/>
-            <a:ext cx="3397299" cy="485775"/>
-          </a:xfrm>
-          <a:prstGeom prst="rect">
-            <a:avLst/>
-          </a:prstGeom>
-          <a:noFill/>
-        </p:spPr>
-        <p:txBody>
-          <a:bodyPr wrap="square" lIns="0" tIns="0" rIns="0" bIns="0" anchor="t">
-            <a:spAutoFit/>
-          </a:bodyPr>
-          <a:lstStyle/>
-          <a:p>
-            <a:pPr algn="ctr"/>
-            <a:r>
-              <a:rPr sz="975" b="1" i="0" u="none">
-                <a:solidFill>
-                  <a:srgbClr val="475569"/>
-                </a:solidFill>
-                <a:latin typeface="JetBrains Mono"/>
-              </a:rPr>
-              <a:t>[INSERIR PRINT: UPDATE com DATA_CANCELAMENTO e MOTIVO_CANCELAMENTO executado com sucesso]</a:t>
-            </a:r>
-          </a:p>
-        </p:txBody>
-      </p:sp>
-      <p:sp>
-        <p:nvSpPr>
-          <p:cNvPr id="83" name="TextBox 82"/>
-          <p:cNvSpPr txBox="1"/>
-          <p:nvPr/>
-        </p:nvSpPr>
-        <p:spPr>
-          <a:xfrm>
-            <a:off x="4254549" y="4877990"/>
-            <a:ext cx="457200" cy="171450"/>
-          </a:xfrm>
-          <a:prstGeom prst="rect">
-            <a:avLst/>
-          </a:prstGeom>
-          <a:noFill/>
-        </p:spPr>
-        <p:txBody>
-          <a:bodyPr wrap="square" lIns="0" tIns="0" rIns="0" bIns="0" anchor="ctr">
-            <a:spAutoFit/>
-          </a:bodyPr>
-          <a:lstStyle/>
-          <a:p>
-            <a:pPr algn="ctr"/>
-            <a:r>
-              <a:rPr sz="825" b="1" i="0" u="none">
-                <a:solidFill>
-                  <a:srgbClr val="1E293B"/>
-                </a:solidFill>
-                <a:latin typeface="Inter"/>
-              </a:rPr>
-              <a:t>3</a:t>
-            </a:r>
-          </a:p>
-        </p:txBody>
-      </p:sp>
-      <p:sp>
-        <p:nvSpPr>
-          <p:cNvPr id="85" name="TextBox 84"/>
-          <p:cNvSpPr txBox="1"/>
-          <p:nvPr/>
-        </p:nvSpPr>
-        <p:spPr>
-          <a:xfrm>
-            <a:off x="8270974" y="4096196"/>
-            <a:ext cx="3397299" cy="647700"/>
-          </a:xfrm>
-          <a:prstGeom prst="rect">
-            <a:avLst/>
-          </a:prstGeom>
-          <a:noFill/>
-        </p:spPr>
-        <p:txBody>
-          <a:bodyPr wrap="square" lIns="0" tIns="0" rIns="0" bIns="0" anchor="t">
-            <a:spAutoFit/>
-          </a:bodyPr>
-          <a:lstStyle/>
-          <a:p>
-            <a:pPr algn="ctr"/>
-            <a:r>
-              <a:rPr sz="975" b="1" i="0" u="none">
-                <a:solidFill>
-                  <a:srgbClr val="475569"/>
-                </a:solidFill>
-                <a:latin typeface="JetBrains Mono"/>
-              </a:rPr>
-              <a:t>[INSERIR PRINT: resultado da consulta com reserva, cliente, proprietário, sala, pagamento da reserva, manutenção, custo e pagamento da manutenção]</a:t>
-            </a:r>
-          </a:p>
-        </p:txBody>
-      </p:sp>
-      <p:sp>
-        <p:nvSpPr>
-          <p:cNvPr id="86" name="TextBox 85"/>
-          <p:cNvSpPr txBox="1"/>
-          <p:nvPr/>
-        </p:nvSpPr>
-        <p:spPr>
-          <a:xfrm>
-            <a:off x="8413849" y="2277367"/>
-            <a:ext cx="590550" cy="126958"/>
-          </a:xfrm>
-          <a:prstGeom prst="rect">
-            <a:avLst/>
-          </a:prstGeom>
-          <a:noFill/>
-        </p:spPr>
-        <p:txBody>
-          <a:bodyPr wrap="square" lIns="0" tIns="0" rIns="0" bIns="0" anchor="t">
-            <a:spAutoFit/>
-          </a:bodyPr>
-          <a:lstStyle/>
-          <a:p>
-            <a:pPr algn="l"/>
-            <a:r>
-              <a:rPr lang="pt-BR" sz="825" b="1" i="0" u="none" dirty="0">
-                <a:solidFill>
-                  <a:srgbClr val="0369A1"/>
-                </a:solidFill>
-                <a:latin typeface="Inter"/>
-              </a:rPr>
-              <a:t>    </a:t>
-            </a:r>
-            <a:r>
-              <a:rPr sz="825" b="1" i="0" u="none" dirty="0" err="1">
-                <a:solidFill>
-                  <a:srgbClr val="0369A1"/>
-                </a:solidFill>
-                <a:latin typeface="Inter"/>
-              </a:rPr>
-              <a:t>Cliente</a:t>
-            </a:r>
-            <a:endParaRPr sz="825" b="1" i="0" u="none" dirty="0">
-              <a:solidFill>
-                <a:srgbClr val="0369A1"/>
-              </a:solidFill>
-              <a:latin typeface="Inter"/>
-            </a:endParaRPr>
-          </a:p>
-        </p:txBody>
-      </p:sp>
-      <p:sp>
-        <p:nvSpPr>
-          <p:cNvPr id="87" name="TextBox 86"/>
-          <p:cNvSpPr txBox="1"/>
-          <p:nvPr/>
-        </p:nvSpPr>
-        <p:spPr>
-          <a:xfrm>
-            <a:off x="9257109" y="2277367"/>
-            <a:ext cx="628650" cy="126958"/>
-          </a:xfrm>
-          <a:prstGeom prst="rect">
-            <a:avLst/>
-          </a:prstGeom>
-          <a:noFill/>
-        </p:spPr>
-        <p:txBody>
-          <a:bodyPr wrap="square" lIns="0" tIns="0" rIns="0" bIns="0" anchor="t">
-            <a:spAutoFit/>
-          </a:bodyPr>
-          <a:lstStyle/>
-          <a:p>
-            <a:pPr algn="l"/>
-            <a:r>
-              <a:rPr lang="pt-BR" sz="825" b="1" i="0" u="none" dirty="0">
-                <a:solidFill>
-                  <a:srgbClr val="0369A1"/>
-                </a:solidFill>
-                <a:latin typeface="Inter"/>
-              </a:rPr>
-              <a:t>    </a:t>
-            </a:r>
-            <a:r>
-              <a:rPr sz="825" b="1" i="0" u="none" dirty="0" err="1">
-                <a:solidFill>
-                  <a:srgbClr val="0369A1"/>
-                </a:solidFill>
-                <a:latin typeface="Inter"/>
-              </a:rPr>
-              <a:t>Reserva</a:t>
-            </a:r>
-            <a:endParaRPr sz="825" b="1" i="0" u="none" dirty="0">
-              <a:solidFill>
-                <a:srgbClr val="0369A1"/>
-              </a:solidFill>
-              <a:latin typeface="Inter"/>
-            </a:endParaRPr>
-          </a:p>
-        </p:txBody>
-      </p:sp>
-      <p:sp>
-        <p:nvSpPr>
-          <p:cNvPr id="88" name="TextBox 87"/>
-          <p:cNvSpPr txBox="1"/>
-          <p:nvPr/>
-        </p:nvSpPr>
-        <p:spPr>
-          <a:xfrm>
-            <a:off x="10138469" y="2277367"/>
-            <a:ext cx="409575" cy="126958"/>
-          </a:xfrm>
-          <a:prstGeom prst="rect">
-            <a:avLst/>
-          </a:prstGeom>
-          <a:noFill/>
-        </p:spPr>
-        <p:txBody>
-          <a:bodyPr wrap="square" lIns="0" tIns="0" rIns="0" bIns="0" anchor="t">
-            <a:spAutoFit/>
-          </a:bodyPr>
-          <a:lstStyle/>
-          <a:p>
-            <a:pPr algn="l"/>
-            <a:r>
-              <a:rPr lang="pt-BR" sz="825" b="1" i="0" u="none" dirty="0">
-                <a:solidFill>
-                  <a:srgbClr val="0369A1"/>
-                </a:solidFill>
-                <a:latin typeface="Inter"/>
-              </a:rPr>
-              <a:t>    </a:t>
-            </a:r>
-            <a:r>
-              <a:rPr sz="825" b="1" i="0" u="none" dirty="0">
-                <a:solidFill>
-                  <a:srgbClr val="0369A1"/>
-                </a:solidFill>
-                <a:latin typeface="Inter"/>
-              </a:rPr>
-              <a:t>Sala</a:t>
-            </a:r>
-          </a:p>
-        </p:txBody>
-      </p:sp>
-      <p:sp>
-        <p:nvSpPr>
-          <p:cNvPr id="89" name="TextBox 88"/>
-          <p:cNvSpPr txBox="1"/>
-          <p:nvPr/>
-        </p:nvSpPr>
-        <p:spPr>
-          <a:xfrm>
-            <a:off x="10800754" y="2277367"/>
-            <a:ext cx="819150" cy="126958"/>
-          </a:xfrm>
-          <a:prstGeom prst="rect">
-            <a:avLst/>
-          </a:prstGeom>
-          <a:noFill/>
-        </p:spPr>
-        <p:txBody>
-          <a:bodyPr wrap="square" lIns="0" tIns="0" rIns="0" bIns="0" anchor="t">
-            <a:spAutoFit/>
-          </a:bodyPr>
-          <a:lstStyle/>
-          <a:p>
-            <a:pPr algn="l"/>
-            <a:r>
-              <a:rPr lang="pt-BR" sz="825" b="1" i="0" u="none" dirty="0">
-                <a:solidFill>
-                  <a:srgbClr val="0369A1"/>
-                </a:solidFill>
-                <a:latin typeface="Inter"/>
-              </a:rPr>
-              <a:t>     </a:t>
-            </a:r>
-            <a:r>
-              <a:rPr sz="825" b="1" i="0" u="none" dirty="0" err="1">
-                <a:solidFill>
-                  <a:srgbClr val="0369A1"/>
-                </a:solidFill>
-                <a:latin typeface="Inter"/>
-              </a:rPr>
-              <a:t>Proprietário</a:t>
-            </a:r>
-            <a:endParaRPr sz="825" b="1" i="0" u="none" dirty="0">
-              <a:solidFill>
-                <a:srgbClr val="0369A1"/>
-              </a:solidFill>
-              <a:latin typeface="Inter"/>
-            </a:endParaRPr>
-          </a:p>
-        </p:txBody>
-      </p:sp>
-      <p:sp>
-        <p:nvSpPr>
-          <p:cNvPr id="90" name="TextBox 89"/>
-          <p:cNvSpPr txBox="1"/>
-          <p:nvPr/>
-        </p:nvSpPr>
-        <p:spPr>
-          <a:xfrm>
-            <a:off x="8550324" y="2525017"/>
-            <a:ext cx="409575" cy="126958"/>
-          </a:xfrm>
-          <a:prstGeom prst="rect">
-            <a:avLst/>
-          </a:prstGeom>
-          <a:noFill/>
-        </p:spPr>
-        <p:txBody>
-          <a:bodyPr wrap="square" lIns="0" tIns="0" rIns="0" bIns="0" anchor="t">
-            <a:spAutoFit/>
-          </a:bodyPr>
-          <a:lstStyle/>
-          <a:p>
-            <a:pPr algn="l"/>
-            <a:r>
-              <a:rPr lang="pt-BR" sz="825" b="1" i="0" u="none" dirty="0">
-                <a:solidFill>
-                  <a:srgbClr val="0369A1"/>
-                </a:solidFill>
-                <a:latin typeface="Inter"/>
-              </a:rPr>
-              <a:t>    </a:t>
-            </a:r>
-            <a:r>
-              <a:rPr sz="825" b="1" i="0" u="none" dirty="0">
-                <a:solidFill>
-                  <a:srgbClr val="0369A1"/>
-                </a:solidFill>
-                <a:latin typeface="Inter"/>
-              </a:rPr>
-              <a:t>Sala</a:t>
-            </a:r>
-          </a:p>
-        </p:txBody>
-      </p:sp>
-      <p:sp>
-        <p:nvSpPr>
-          <p:cNvPr id="91" name="TextBox 90"/>
-          <p:cNvSpPr txBox="1"/>
-          <p:nvPr/>
-        </p:nvSpPr>
-        <p:spPr>
-          <a:xfrm>
-            <a:off x="9226599" y="2525017"/>
-            <a:ext cx="866775" cy="126958"/>
-          </a:xfrm>
-          <a:prstGeom prst="rect">
-            <a:avLst/>
-          </a:prstGeom>
-          <a:noFill/>
-        </p:spPr>
-        <p:txBody>
-          <a:bodyPr wrap="square" lIns="0" tIns="0" rIns="0" bIns="0" anchor="t">
-            <a:spAutoFit/>
-          </a:bodyPr>
-          <a:lstStyle/>
-          <a:p>
-            <a:pPr algn="l"/>
-            <a:r>
-              <a:rPr lang="pt-BR" sz="825" b="1" i="0" u="none" dirty="0">
-                <a:solidFill>
-                  <a:srgbClr val="0F766E"/>
-                </a:solidFill>
-                <a:latin typeface="Inter"/>
-              </a:rPr>
-              <a:t>     </a:t>
-            </a:r>
-            <a:r>
-              <a:rPr sz="825" b="1" i="0" u="none" dirty="0" err="1">
-                <a:solidFill>
-                  <a:srgbClr val="0F766E"/>
-                </a:solidFill>
-                <a:latin typeface="Inter"/>
-              </a:rPr>
-              <a:t>Manutenção</a:t>
-            </a:r>
-            <a:endParaRPr sz="825" b="1" i="0" u="none" dirty="0">
-              <a:solidFill>
-                <a:srgbClr val="0F766E"/>
-              </a:solidFill>
-              <a:latin typeface="Inter"/>
-            </a:endParaRPr>
-          </a:p>
-        </p:txBody>
-      </p:sp>
-      <p:sp>
-        <p:nvSpPr>
-          <p:cNvPr id="92" name="TextBox 91"/>
-          <p:cNvSpPr txBox="1"/>
-          <p:nvPr/>
-        </p:nvSpPr>
-        <p:spPr>
-          <a:xfrm>
-            <a:off x="10360074" y="2525017"/>
-            <a:ext cx="1123950" cy="126958"/>
-          </a:xfrm>
-          <a:prstGeom prst="rect">
-            <a:avLst/>
-          </a:prstGeom>
-          <a:noFill/>
-        </p:spPr>
-        <p:txBody>
-          <a:bodyPr wrap="square" lIns="0" tIns="0" rIns="0" bIns="0" anchor="t">
-            <a:spAutoFit/>
-          </a:bodyPr>
-          <a:lstStyle/>
-          <a:p>
-            <a:pPr algn="l"/>
-            <a:r>
-              <a:rPr lang="pt-BR" sz="825" b="1" i="0" u="none" dirty="0">
-                <a:solidFill>
-                  <a:srgbClr val="0F766E"/>
-                </a:solidFill>
-                <a:latin typeface="Inter"/>
-              </a:rPr>
-              <a:t>     </a:t>
-            </a:r>
-            <a:r>
-              <a:rPr sz="825" b="1" i="0" u="none" dirty="0" err="1">
-                <a:solidFill>
-                  <a:srgbClr val="0F766E"/>
-                </a:solidFill>
-                <a:latin typeface="Inter"/>
-              </a:rPr>
-              <a:t>Custo</a:t>
-            </a:r>
-            <a:r>
-              <a:rPr sz="825" b="1" i="0" u="none" dirty="0">
-                <a:solidFill>
-                  <a:srgbClr val="0F766E"/>
-                </a:solidFill>
-                <a:latin typeface="Inter"/>
-              </a:rPr>
-              <a:t> (</a:t>
-            </a:r>
-            <a:r>
-              <a:rPr sz="825" b="1" i="0" u="none" dirty="0" err="1">
-                <a:solidFill>
-                  <a:srgbClr val="0F766E"/>
-                </a:solidFill>
-                <a:latin typeface="Inter"/>
-              </a:rPr>
-              <a:t>pago</a:t>
-            </a:r>
-            <a:r>
-              <a:rPr sz="825" b="1" i="0" u="none" dirty="0">
-                <a:solidFill>
-                  <a:srgbClr val="0F766E"/>
-                </a:solidFill>
-                <a:latin typeface="Inter"/>
-              </a:rPr>
-              <a:t>/</a:t>
-            </a:r>
-            <a:r>
-              <a:rPr sz="825" b="1" i="0" u="none" dirty="0" err="1">
-                <a:solidFill>
-                  <a:srgbClr val="0F766E"/>
-                </a:solidFill>
-                <a:latin typeface="Inter"/>
-              </a:rPr>
-              <a:t>não</a:t>
-            </a:r>
-            <a:r>
-              <a:rPr sz="825" b="1" i="0" u="none" dirty="0">
-                <a:solidFill>
-                  <a:srgbClr val="0F766E"/>
-                </a:solidFill>
-                <a:latin typeface="Inter"/>
-              </a:rPr>
-              <a:t>)</a:t>
-            </a:r>
-          </a:p>
-        </p:txBody>
-      </p:sp>
-      <p:pic>
-        <p:nvPicPr>
-          <p:cNvPr id="94" name="Imagem 93">
+              </a:ln>
+              <a:effectLst/>
+            </p:spPr>
+            <p:style>
+              <a:lnRef idx="1">
+                <a:schemeClr val="accent1"/>
+              </a:lnRef>
+              <a:fillRef idx="3">
+                <a:schemeClr val="accent1"/>
+              </a:fillRef>
+              <a:effectRef idx="2">
+                <a:schemeClr val="accent1"/>
+              </a:effectRef>
+              <a:fontRef idx="minor">
+                <a:schemeClr val="lt1"/>
+              </a:fontRef>
+            </p:style>
+            <p:txBody>
+              <a:bodyPr rtlCol="0" anchor="ctr"/>
+              <a:lstStyle/>
+              <a:p>
+                <a:pPr algn="ctr"/>
+                <a:endParaRPr/>
+              </a:p>
+            </p:txBody>
+          </p:sp>
+          <p:pic>
+            <p:nvPicPr>
+              <p:cNvPr id="40" name="Picture 39" descr="image.png"/>
+              <p:cNvPicPr>
+                <a:picLocks noChangeAspect="1"/>
+              </p:cNvPicPr>
+              <p:nvPr/>
+            </p:nvPicPr>
+            <p:blipFill>
+              <a:blip r:embed="rId2"/>
+              <a:stretch>
+                <a:fillRect/>
+              </a:stretch>
+            </p:blipFill>
+            <p:spPr>
+              <a:xfrm>
+                <a:off x="542925" y="1115317"/>
+                <a:ext cx="161925" cy="161925"/>
+              </a:xfrm>
+              <a:prstGeom prst="rect">
+                <a:avLst/>
+              </a:prstGeom>
+            </p:spPr>
+          </p:pic>
+          <p:pic>
+            <p:nvPicPr>
+              <p:cNvPr id="43" name="Picture 42" descr="image.png"/>
+              <p:cNvPicPr>
+                <a:picLocks noChangeAspect="1"/>
+              </p:cNvPicPr>
+              <p:nvPr/>
+            </p:nvPicPr>
+            <p:blipFill>
+              <a:blip r:embed="rId3"/>
+              <a:stretch>
+                <a:fillRect/>
+              </a:stretch>
+            </p:blipFill>
+            <p:spPr>
+              <a:xfrm>
+                <a:off x="2103387" y="2692598"/>
+                <a:ext cx="238125" cy="190500"/>
+              </a:xfrm>
+              <a:prstGeom prst="rect">
+                <a:avLst/>
+              </a:prstGeom>
+            </p:spPr>
+          </p:pic>
+          <p:pic>
+            <p:nvPicPr>
+              <p:cNvPr id="44" name="Picture 43" descr="image.png"/>
+              <p:cNvPicPr>
+                <a:picLocks noChangeAspect="1"/>
+              </p:cNvPicPr>
+              <p:nvPr/>
+            </p:nvPicPr>
+            <p:blipFill>
+              <a:blip r:embed="rId4"/>
+              <a:stretch>
+                <a:fillRect/>
+              </a:stretch>
+            </p:blipFill>
+            <p:spPr>
+              <a:xfrm>
+                <a:off x="2127200" y="4756695"/>
+                <a:ext cx="190500" cy="190500"/>
+              </a:xfrm>
+              <a:prstGeom prst="rect">
+                <a:avLst/>
+              </a:prstGeom>
+            </p:spPr>
+          </p:pic>
+          <p:sp>
+            <p:nvSpPr>
+              <p:cNvPr id="77" name="TextBox 76"/>
+              <p:cNvSpPr txBox="1"/>
+              <p:nvPr/>
+            </p:nvSpPr>
+            <p:spPr>
+              <a:xfrm>
+                <a:off x="523875" y="2940248"/>
+                <a:ext cx="3397299" cy="323850"/>
+              </a:xfrm>
+              <a:prstGeom prst="rect">
+                <a:avLst/>
+              </a:prstGeom>
+              <a:noFill/>
+            </p:spPr>
+            <p:txBody>
+              <a:bodyPr wrap="square" lIns="0" tIns="0" rIns="0" bIns="0" anchor="t">
+                <a:spAutoFit/>
+              </a:bodyPr>
+              <a:lstStyle/>
+              <a:p>
+                <a:pPr algn="ctr"/>
+                <a:r>
+                  <a:rPr sz="975" b="1" i="0" u="none">
+                    <a:solidFill>
+                      <a:srgbClr val="475569"/>
+                    </a:solidFill>
+                    <a:latin typeface="JetBrains Mono"/>
+                  </a:rPr>
+                  <a:t>[INSERIR PRINT: consulta SQL do faturamento por sala e mês]</a:t>
+                </a:r>
+              </a:p>
+            </p:txBody>
+          </p:sp>
+          <p:pic>
+            <p:nvPicPr>
+              <p:cNvPr id="94" name="Imagem 93">
+                <a:extLst>
+                  <a:ext uri="{FF2B5EF4-FFF2-40B4-BE49-F238E27FC236}">
+                    <a16:creationId xmlns:a16="http://schemas.microsoft.com/office/drawing/2014/main" id="{F7124960-DE29-4687-BDF8-74773A106914}"/>
+                  </a:ext>
+                </a:extLst>
+              </p:cNvPr>
+              <p:cNvPicPr>
+                <a:picLocks noChangeAspect="1"/>
+              </p:cNvPicPr>
+              <p:nvPr/>
+            </p:nvPicPr>
+            <p:blipFill>
+              <a:blip r:embed="rId5"/>
+              <a:stretch>
+                <a:fillRect/>
+              </a:stretch>
+            </p:blipFill>
+            <p:spPr>
+              <a:xfrm>
+                <a:off x="572096" y="2098348"/>
+                <a:ext cx="3309278" cy="1741586"/>
+              </a:xfrm>
+              <a:prstGeom prst="rect">
+                <a:avLst/>
+              </a:prstGeom>
+            </p:spPr>
+          </p:pic>
+          <p:pic>
+            <p:nvPicPr>
+              <p:cNvPr id="96" name="Imagem 95">
+                <a:extLst>
+                  <a:ext uri="{FF2B5EF4-FFF2-40B4-BE49-F238E27FC236}">
+                    <a16:creationId xmlns:a16="http://schemas.microsoft.com/office/drawing/2014/main" id="{C9AD31DC-0F90-40AB-82DA-0C7375EC8429}"/>
+                  </a:ext>
+                </a:extLst>
+              </p:cNvPr>
+              <p:cNvPicPr>
+                <a:picLocks noChangeAspect="1"/>
+              </p:cNvPicPr>
+              <p:nvPr/>
+            </p:nvPicPr>
+            <p:blipFill>
+              <a:blip r:embed="rId6"/>
+              <a:stretch>
+                <a:fillRect/>
+              </a:stretch>
+            </p:blipFill>
+            <p:spPr>
+              <a:xfrm>
+                <a:off x="572096" y="3986232"/>
+                <a:ext cx="3309278" cy="1177185"/>
+              </a:xfrm>
+              <a:prstGeom prst="rect">
+                <a:avLst/>
+              </a:prstGeom>
+            </p:spPr>
+          </p:pic>
+        </p:grpSp>
+      </p:grpSp>
+      <p:grpSp>
+        <p:nvGrpSpPr>
+          <p:cNvPr id="10" name="Agrupar 9">
             <a:extLst>
               <a:ext uri="{FF2B5EF4-FFF2-40B4-BE49-F238E27FC236}">
-                <a16:creationId xmlns:a16="http://schemas.microsoft.com/office/drawing/2014/main" id="{F7124960-DE29-4687-BDF8-74773A106914}"/>
+                <a16:creationId xmlns:a16="http://schemas.microsoft.com/office/drawing/2014/main" id="{6CB3B28D-8C3E-41FA-A3C1-803BF9328820}"/>
               </a:ext>
             </a:extLst>
           </p:cNvPr>
-          <p:cNvPicPr>
-            <a:picLocks noChangeAspect="1"/>
-          </p:cNvPicPr>
+          <p:cNvGrpSpPr/>
           <p:nvPr/>
-        </p:nvPicPr>
-        <p:blipFill>
-          <a:blip r:embed="rId18"/>
-          <a:stretch>
-            <a:fillRect/>
-          </a:stretch>
-        </p:blipFill>
-        <p:spPr>
+        </p:nvGrpSpPr>
+        <p:grpSpPr>
           <a:xfrm>
-            <a:off x="572096" y="2098348"/>
-            <a:ext cx="3309278" cy="1741586"/>
+            <a:off x="6796163" y="862905"/>
+            <a:ext cx="3673524" cy="5613674"/>
+            <a:chOff x="4254549" y="986730"/>
+            <a:chExt cx="3673524" cy="5613674"/>
           </a:xfrm>
-          <a:prstGeom prst="rect">
-            <a:avLst/>
-          </a:prstGeom>
-        </p:spPr>
-      </p:pic>
-      <p:pic>
-        <p:nvPicPr>
-          <p:cNvPr id="96" name="Imagem 95">
-            <a:extLst>
-              <a:ext uri="{FF2B5EF4-FFF2-40B4-BE49-F238E27FC236}">
-                <a16:creationId xmlns:a16="http://schemas.microsoft.com/office/drawing/2014/main" id="{C9AD31DC-0F90-40AB-82DA-0C7375EC8429}"/>
-              </a:ext>
-            </a:extLst>
-          </p:cNvPr>
-          <p:cNvPicPr>
-            <a:picLocks noChangeAspect="1"/>
-          </p:cNvPicPr>
-          <p:nvPr/>
-        </p:nvPicPr>
-        <p:blipFill>
-          <a:blip r:embed="rId19"/>
-          <a:stretch>
-            <a:fillRect/>
-          </a:stretch>
-        </p:blipFill>
-        <p:spPr>
-          <a:xfrm>
-            <a:off x="572096" y="3986232"/>
-            <a:ext cx="3309278" cy="1177185"/>
-          </a:xfrm>
-          <a:prstGeom prst="rect">
-            <a:avLst/>
-          </a:prstGeom>
-        </p:spPr>
-      </p:pic>
-      <p:pic>
-        <p:nvPicPr>
-          <p:cNvPr id="101" name="Imagem 100">
-            <a:extLst>
-              <a:ext uri="{FF2B5EF4-FFF2-40B4-BE49-F238E27FC236}">
-                <a16:creationId xmlns:a16="http://schemas.microsoft.com/office/drawing/2014/main" id="{72132D0F-062B-4450-9F94-80F977F6032E}"/>
-              </a:ext>
-            </a:extLst>
-          </p:cNvPr>
-          <p:cNvPicPr>
-            <a:picLocks noChangeAspect="1"/>
-          </p:cNvPicPr>
-          <p:nvPr/>
-        </p:nvPicPr>
-        <p:blipFill>
-          <a:blip r:embed="rId20"/>
-          <a:stretch>
-            <a:fillRect/>
-          </a:stretch>
-        </p:blipFill>
-        <p:spPr>
-          <a:xfrm>
-            <a:off x="4424039" y="2390269"/>
-            <a:ext cx="3370683" cy="726787"/>
-          </a:xfrm>
-          <a:prstGeom prst="rect">
-            <a:avLst/>
-          </a:prstGeom>
-        </p:spPr>
-      </p:pic>
-      <p:pic>
-        <p:nvPicPr>
-          <p:cNvPr id="103" name="Imagem 102">
-            <a:extLst>
-              <a:ext uri="{FF2B5EF4-FFF2-40B4-BE49-F238E27FC236}">
-                <a16:creationId xmlns:a16="http://schemas.microsoft.com/office/drawing/2014/main" id="{F17376E4-05E5-412C-8E8C-C98314F45B61}"/>
-              </a:ext>
-            </a:extLst>
-          </p:cNvPr>
-          <p:cNvPicPr>
-            <a:picLocks noChangeAspect="1"/>
-          </p:cNvPicPr>
-          <p:nvPr/>
-        </p:nvPicPr>
-        <p:blipFill>
-          <a:blip r:embed="rId21"/>
-          <a:stretch>
-            <a:fillRect/>
-          </a:stretch>
-        </p:blipFill>
-        <p:spPr>
-          <a:xfrm>
-            <a:off x="4458781" y="3663462"/>
-            <a:ext cx="3335941" cy="919253"/>
-          </a:xfrm>
-          <a:prstGeom prst="rect">
-            <a:avLst/>
-          </a:prstGeom>
-        </p:spPr>
-      </p:pic>
-      <p:pic>
-        <p:nvPicPr>
-          <p:cNvPr id="105" name="Imagem 104">
-            <a:extLst>
-              <a:ext uri="{FF2B5EF4-FFF2-40B4-BE49-F238E27FC236}">
-                <a16:creationId xmlns:a16="http://schemas.microsoft.com/office/drawing/2014/main" id="{F4895028-0AB6-4B71-90BD-B1EC5B354884}"/>
-              </a:ext>
-            </a:extLst>
-          </p:cNvPr>
-          <p:cNvPicPr>
-            <a:picLocks noChangeAspect="1"/>
-          </p:cNvPicPr>
-          <p:nvPr/>
-        </p:nvPicPr>
-        <p:blipFill>
-          <a:blip r:embed="rId22"/>
-          <a:stretch>
-            <a:fillRect/>
-          </a:stretch>
-        </p:blipFill>
-        <p:spPr>
-          <a:xfrm>
-            <a:off x="4467722" y="5145723"/>
-            <a:ext cx="3220340" cy="1359852"/>
-          </a:xfrm>
-          <a:prstGeom prst="rect">
-            <a:avLst/>
-          </a:prstGeom>
-        </p:spPr>
-      </p:pic>
-      <p:pic>
-        <p:nvPicPr>
-          <p:cNvPr id="107" name="Imagem 106">
-            <a:extLst>
-              <a:ext uri="{FF2B5EF4-FFF2-40B4-BE49-F238E27FC236}">
-                <a16:creationId xmlns:a16="http://schemas.microsoft.com/office/drawing/2014/main" id="{3E8EAB87-FFE4-4789-B964-39A662A1EA08}"/>
-              </a:ext>
-            </a:extLst>
-          </p:cNvPr>
-          <p:cNvPicPr>
-            <a:picLocks noChangeAspect="1"/>
-          </p:cNvPicPr>
-          <p:nvPr/>
-        </p:nvPicPr>
-        <p:blipFill>
-          <a:blip r:embed="rId23"/>
-          <a:stretch>
-            <a:fillRect/>
-          </a:stretch>
-        </p:blipFill>
-        <p:spPr>
-          <a:xfrm>
-            <a:off x="8356699" y="2908694"/>
-            <a:ext cx="3263206" cy="2759449"/>
-          </a:xfrm>
-          <a:prstGeom prst="rect">
-            <a:avLst/>
-          </a:prstGeom>
-        </p:spPr>
-      </p:pic>
+        </p:grpSpPr>
+        <p:sp>
+          <p:nvSpPr>
+            <p:cNvPr id="11" name="Rectangle 10"/>
+            <p:cNvSpPr/>
+            <p:nvPr/>
+          </p:nvSpPr>
+          <p:spPr>
+            <a:xfrm>
+              <a:off x="4264074" y="986730"/>
+              <a:ext cx="3663999" cy="419100"/>
+            </a:xfrm>
+            <a:prstGeom prst="rect">
+              <a:avLst/>
+            </a:prstGeom>
+            <a:solidFill>
+              <a:srgbClr val="E8590C"/>
+            </a:solidFill>
+            <a:ln>
+              <a:noFill/>
+            </a:ln>
+            <a:effectLst/>
+          </p:spPr>
+          <p:style>
+            <a:lnRef idx="1">
+              <a:schemeClr val="accent1"/>
+            </a:lnRef>
+            <a:fillRef idx="3">
+              <a:schemeClr val="accent1"/>
+            </a:fillRef>
+            <a:effectRef idx="2">
+              <a:schemeClr val="accent1"/>
+            </a:effectRef>
+            <a:fontRef idx="minor">
+              <a:schemeClr val="lt1"/>
+            </a:fontRef>
+          </p:style>
+          <p:txBody>
+            <a:bodyPr rtlCol="0" anchor="ctr"/>
+            <a:lstStyle/>
+            <a:p>
+              <a:pPr algn="ctr"/>
+              <a:endParaRPr/>
+            </a:p>
+          </p:txBody>
+        </p:sp>
+        <p:grpSp>
+          <p:nvGrpSpPr>
+            <p:cNvPr id="9" name="Agrupar 8">
+              <a:extLst>
+                <a:ext uri="{FF2B5EF4-FFF2-40B4-BE49-F238E27FC236}">
+                  <a16:creationId xmlns:a16="http://schemas.microsoft.com/office/drawing/2014/main" id="{DC9A74D6-6335-4212-9532-41BFF53602DC}"/>
+                </a:ext>
+              </a:extLst>
+            </p:cNvPr>
+            <p:cNvGrpSpPr/>
+            <p:nvPr/>
+          </p:nvGrpSpPr>
+          <p:grpSpPr>
+            <a:xfrm>
+              <a:off x="4254549" y="1101030"/>
+              <a:ext cx="3673524" cy="5499374"/>
+              <a:chOff x="4254549" y="1101030"/>
+              <a:chExt cx="3673524" cy="5499374"/>
+            </a:xfrm>
+          </p:grpSpPr>
+          <p:sp>
+            <p:nvSpPr>
+              <p:cNvPr id="12" name="Rectangle 11"/>
+              <p:cNvSpPr/>
+              <p:nvPr/>
+            </p:nvSpPr>
+            <p:spPr>
+              <a:xfrm>
+                <a:off x="4264074" y="1405830"/>
+                <a:ext cx="3663999" cy="605135"/>
+              </a:xfrm>
+              <a:prstGeom prst="rect">
+                <a:avLst/>
+              </a:prstGeom>
+              <a:solidFill>
+                <a:srgbClr val="FFFFFF"/>
+              </a:solidFill>
+              <a:ln>
+                <a:noFill/>
+              </a:ln>
+              <a:effectLst/>
+            </p:spPr>
+            <p:style>
+              <a:lnRef idx="1">
+                <a:schemeClr val="accent1"/>
+              </a:lnRef>
+              <a:fillRef idx="3">
+                <a:schemeClr val="accent1"/>
+              </a:fillRef>
+              <a:effectRef idx="2">
+                <a:schemeClr val="accent1"/>
+              </a:effectRef>
+              <a:fontRef idx="minor">
+                <a:schemeClr val="lt1"/>
+              </a:fontRef>
+            </p:style>
+            <p:txBody>
+              <a:bodyPr rtlCol="0" anchor="ctr"/>
+              <a:lstStyle/>
+              <a:p>
+                <a:pPr algn="ctr"/>
+                <a:endParaRPr/>
+              </a:p>
+            </p:txBody>
+          </p:sp>
+          <p:sp>
+            <p:nvSpPr>
+              <p:cNvPr id="13" name="Rectangle 12"/>
+              <p:cNvSpPr/>
+              <p:nvPr/>
+            </p:nvSpPr>
+            <p:spPr>
+              <a:xfrm>
+                <a:off x="4264074" y="2010965"/>
+                <a:ext cx="3663999" cy="4589439"/>
+              </a:xfrm>
+              <a:prstGeom prst="rect">
+                <a:avLst/>
+              </a:prstGeom>
+              <a:solidFill>
+                <a:srgbClr val="F1F5F9"/>
+              </a:solidFill>
+              <a:ln>
+                <a:noFill/>
+              </a:ln>
+              <a:effectLst/>
+            </p:spPr>
+            <p:style>
+              <a:lnRef idx="1">
+                <a:schemeClr val="accent1"/>
+              </a:lnRef>
+              <a:fillRef idx="3">
+                <a:schemeClr val="accent1"/>
+              </a:fillRef>
+              <a:effectRef idx="2">
+                <a:schemeClr val="accent1"/>
+              </a:effectRef>
+              <a:fontRef idx="minor">
+                <a:schemeClr val="lt1"/>
+              </a:fontRef>
+            </p:style>
+            <p:txBody>
+              <a:bodyPr rtlCol="0" anchor="ctr"/>
+              <a:lstStyle/>
+              <a:p>
+                <a:pPr algn="ctr"/>
+                <a:endParaRPr/>
+              </a:p>
+            </p:txBody>
+          </p:sp>
+          <p:sp>
+            <p:nvSpPr>
+              <p:cNvPr id="14" name="Rectangle 13"/>
+              <p:cNvSpPr/>
+              <p:nvPr/>
+            </p:nvSpPr>
+            <p:spPr>
+              <a:xfrm>
+                <a:off x="4264074" y="2001440"/>
+                <a:ext cx="3663999" cy="9525"/>
+              </a:xfrm>
+              <a:prstGeom prst="rect">
+                <a:avLst/>
+              </a:prstGeom>
+              <a:solidFill>
+                <a:srgbClr val="E2E8F0"/>
+              </a:solidFill>
+              <a:ln>
+                <a:noFill/>
+              </a:ln>
+              <a:effectLst/>
+            </p:spPr>
+            <p:style>
+              <a:lnRef idx="1">
+                <a:schemeClr val="accent1"/>
+              </a:lnRef>
+              <a:fillRef idx="3">
+                <a:schemeClr val="accent1"/>
+              </a:fillRef>
+              <a:effectRef idx="2">
+                <a:schemeClr val="accent1"/>
+              </a:effectRef>
+              <a:fontRef idx="minor">
+                <a:schemeClr val="lt1"/>
+              </a:fontRef>
+            </p:style>
+            <p:txBody>
+              <a:bodyPr rtlCol="0" anchor="ctr"/>
+              <a:lstStyle/>
+              <a:p>
+                <a:pPr algn="ctr"/>
+                <a:endParaRPr/>
+              </a:p>
+            </p:txBody>
+          </p:sp>
+          <p:sp>
+            <p:nvSpPr>
+              <p:cNvPr id="16" name="Rectangle 15"/>
+              <p:cNvSpPr/>
+              <p:nvPr/>
+            </p:nvSpPr>
+            <p:spPr>
+              <a:xfrm>
+                <a:off x="4264074" y="5857875"/>
+                <a:ext cx="3663999" cy="9525"/>
+              </a:xfrm>
+              <a:prstGeom prst="rect">
+                <a:avLst/>
+              </a:prstGeom>
+              <a:solidFill>
+                <a:srgbClr val="E2E8F0"/>
+              </a:solidFill>
+              <a:ln>
+                <a:noFill/>
+              </a:ln>
+              <a:effectLst/>
+            </p:spPr>
+            <p:style>
+              <a:lnRef idx="1">
+                <a:schemeClr val="accent1"/>
+              </a:lnRef>
+              <a:fillRef idx="3">
+                <a:schemeClr val="accent1"/>
+              </a:fillRef>
+              <a:effectRef idx="2">
+                <a:schemeClr val="accent1"/>
+              </a:effectRef>
+              <a:fontRef idx="minor">
+                <a:schemeClr val="lt1"/>
+              </a:fontRef>
+            </p:style>
+            <p:txBody>
+              <a:bodyPr rtlCol="0" anchor="ctr"/>
+              <a:lstStyle/>
+              <a:p>
+                <a:pPr algn="ctr"/>
+                <a:endParaRPr/>
+              </a:p>
+            </p:txBody>
+          </p:sp>
+          <p:sp>
+            <p:nvSpPr>
+              <p:cNvPr id="25" name="Rounded Rectangle 24"/>
+              <p:cNvSpPr/>
+              <p:nvPr/>
+            </p:nvSpPr>
+            <p:spPr>
+              <a:xfrm>
+                <a:off x="4397424" y="2372915"/>
+                <a:ext cx="3397299" cy="800100"/>
+              </a:xfrm>
+              <a:prstGeom prst="roundRect">
+                <a:avLst>
+                  <a:gd name="adj" fmla="val 9523"/>
+                </a:avLst>
+              </a:prstGeom>
+              <a:solidFill>
+                <a:srgbClr val="FEF2F2"/>
+              </a:solidFill>
+              <a:ln w="19050">
+                <a:solidFill>
+                  <a:srgbClr val="EF4444"/>
+                </a:solidFill>
+              </a:ln>
+              <a:effectLst/>
+            </p:spPr>
+            <p:style>
+              <a:lnRef idx="1">
+                <a:schemeClr val="accent1"/>
+              </a:lnRef>
+              <a:fillRef idx="3">
+                <a:schemeClr val="accent1"/>
+              </a:fillRef>
+              <a:effectRef idx="2">
+                <a:schemeClr val="accent1"/>
+              </a:effectRef>
+              <a:fontRef idx="minor">
+                <a:schemeClr val="lt1"/>
+              </a:fontRef>
+            </p:style>
+            <p:txBody>
+              <a:bodyPr rtlCol="0" anchor="ctr"/>
+              <a:lstStyle/>
+              <a:p>
+                <a:pPr algn="ctr"/>
+                <a:endParaRPr/>
+              </a:p>
+            </p:txBody>
+          </p:sp>
+          <p:sp>
+            <p:nvSpPr>
+              <p:cNvPr id="26" name="Rounded Rectangle 25"/>
+              <p:cNvSpPr/>
+              <p:nvPr/>
+            </p:nvSpPr>
+            <p:spPr>
+              <a:xfrm>
+                <a:off x="4397424" y="3658790"/>
+                <a:ext cx="3397299" cy="962025"/>
+              </a:xfrm>
+              <a:prstGeom prst="roundRect">
+                <a:avLst>
+                  <a:gd name="adj" fmla="val 7920"/>
+                </a:avLst>
+              </a:prstGeom>
+              <a:solidFill>
+                <a:srgbClr val="FFFFFF"/>
+              </a:solidFill>
+              <a:ln w="19050">
+                <a:solidFill>
+                  <a:srgbClr val="CBD5E1"/>
+                </a:solidFill>
+              </a:ln>
+              <a:effectLst/>
+            </p:spPr>
+            <p:style>
+              <a:lnRef idx="1">
+                <a:schemeClr val="accent1"/>
+              </a:lnRef>
+              <a:fillRef idx="3">
+                <a:schemeClr val="accent1"/>
+              </a:fillRef>
+              <a:effectRef idx="2">
+                <a:schemeClr val="accent1"/>
+              </a:effectRef>
+              <a:fontRef idx="minor">
+                <a:schemeClr val="lt1"/>
+              </a:fontRef>
+            </p:style>
+            <p:txBody>
+              <a:bodyPr rtlCol="0" anchor="ctr"/>
+              <a:lstStyle/>
+              <a:p>
+                <a:pPr algn="ctr"/>
+                <a:endParaRPr/>
+              </a:p>
+            </p:txBody>
+          </p:sp>
+          <p:sp>
+            <p:nvSpPr>
+              <p:cNvPr id="27" name="Rounded Rectangle 26"/>
+              <p:cNvSpPr/>
+              <p:nvPr/>
+            </p:nvSpPr>
+            <p:spPr>
+              <a:xfrm>
+                <a:off x="4397424" y="5106590"/>
+                <a:ext cx="3397299" cy="1493814"/>
+              </a:xfrm>
+              <a:prstGeom prst="roundRect">
+                <a:avLst>
+                  <a:gd name="adj" fmla="val 9523"/>
+                </a:avLst>
+              </a:prstGeom>
+              <a:solidFill>
+                <a:srgbClr val="FFFFFF"/>
+              </a:solidFill>
+              <a:ln w="19050">
+                <a:solidFill>
+                  <a:srgbClr val="CBD5E1"/>
+                </a:solidFill>
+              </a:ln>
+              <a:effectLst/>
+            </p:spPr>
+            <p:style>
+              <a:lnRef idx="1">
+                <a:schemeClr val="accent1"/>
+              </a:lnRef>
+              <a:fillRef idx="3">
+                <a:schemeClr val="accent1"/>
+              </a:fillRef>
+              <a:effectRef idx="2">
+                <a:schemeClr val="accent1"/>
+              </a:effectRef>
+              <a:fontRef idx="minor">
+                <a:schemeClr val="lt1"/>
+              </a:fontRef>
+            </p:style>
+            <p:txBody>
+              <a:bodyPr rtlCol="0" anchor="ctr"/>
+              <a:lstStyle/>
+              <a:p>
+                <a:pPr algn="ctr"/>
+                <a:endParaRPr/>
+              </a:p>
+            </p:txBody>
+          </p:sp>
+          <p:sp>
+            <p:nvSpPr>
+              <p:cNvPr id="30" name="Rounded Rectangle 29"/>
+              <p:cNvSpPr/>
+              <p:nvPr/>
+            </p:nvSpPr>
+            <p:spPr>
+              <a:xfrm>
+                <a:off x="4397424" y="2144315"/>
+                <a:ext cx="171450" cy="171450"/>
+              </a:xfrm>
+              <a:prstGeom prst="roundRect">
+                <a:avLst>
+                  <a:gd name="adj" fmla="val 50000"/>
+                </a:avLst>
+              </a:prstGeom>
+              <a:solidFill>
+                <a:srgbClr val="E2E8F0"/>
+              </a:solidFill>
+              <a:ln>
+                <a:noFill/>
+              </a:ln>
+              <a:effectLst/>
+            </p:spPr>
+            <p:style>
+              <a:lnRef idx="1">
+                <a:schemeClr val="accent1"/>
+              </a:lnRef>
+              <a:fillRef idx="3">
+                <a:schemeClr val="accent1"/>
+              </a:fillRef>
+              <a:effectRef idx="2">
+                <a:schemeClr val="accent1"/>
+              </a:effectRef>
+              <a:fontRef idx="minor">
+                <a:schemeClr val="lt1"/>
+              </a:fontRef>
+            </p:style>
+            <p:txBody>
+              <a:bodyPr rtlCol="0" anchor="ctr"/>
+              <a:lstStyle/>
+              <a:p>
+                <a:pPr algn="ctr"/>
+                <a:endParaRPr/>
+              </a:p>
+            </p:txBody>
+          </p:sp>
+          <p:sp>
+            <p:nvSpPr>
+              <p:cNvPr id="31" name="Rounded Rectangle 30"/>
+              <p:cNvSpPr/>
+              <p:nvPr/>
+            </p:nvSpPr>
+            <p:spPr>
+              <a:xfrm>
+                <a:off x="4397424" y="3430190"/>
+                <a:ext cx="171450" cy="171450"/>
+              </a:xfrm>
+              <a:prstGeom prst="roundRect">
+                <a:avLst>
+                  <a:gd name="adj" fmla="val 50000"/>
+                </a:avLst>
+              </a:prstGeom>
+              <a:solidFill>
+                <a:srgbClr val="E2E8F0"/>
+              </a:solidFill>
+              <a:ln>
+                <a:noFill/>
+              </a:ln>
+              <a:effectLst/>
+            </p:spPr>
+            <p:style>
+              <a:lnRef idx="1">
+                <a:schemeClr val="accent1"/>
+              </a:lnRef>
+              <a:fillRef idx="3">
+                <a:schemeClr val="accent1"/>
+              </a:fillRef>
+              <a:effectRef idx="2">
+                <a:schemeClr val="accent1"/>
+              </a:effectRef>
+              <a:fontRef idx="minor">
+                <a:schemeClr val="lt1"/>
+              </a:fontRef>
+            </p:style>
+            <p:txBody>
+              <a:bodyPr rtlCol="0" anchor="ctr"/>
+              <a:lstStyle/>
+              <a:p>
+                <a:pPr algn="ctr"/>
+                <a:endParaRPr/>
+              </a:p>
+            </p:txBody>
+          </p:sp>
+          <p:sp>
+            <p:nvSpPr>
+              <p:cNvPr id="32" name="Rounded Rectangle 31"/>
+              <p:cNvSpPr/>
+              <p:nvPr/>
+            </p:nvSpPr>
+            <p:spPr>
+              <a:xfrm>
+                <a:off x="4397424" y="4877990"/>
+                <a:ext cx="171450" cy="171450"/>
+              </a:xfrm>
+              <a:prstGeom prst="roundRect">
+                <a:avLst>
+                  <a:gd name="adj" fmla="val 50000"/>
+                </a:avLst>
+              </a:prstGeom>
+              <a:solidFill>
+                <a:srgbClr val="E2E8F0"/>
+              </a:solidFill>
+              <a:ln>
+                <a:noFill/>
+              </a:ln>
+              <a:effectLst/>
+            </p:spPr>
+            <p:style>
+              <a:lnRef idx="1">
+                <a:schemeClr val="accent1"/>
+              </a:lnRef>
+              <a:fillRef idx="3">
+                <a:schemeClr val="accent1"/>
+              </a:fillRef>
+              <a:effectRef idx="2">
+                <a:schemeClr val="accent1"/>
+              </a:effectRef>
+              <a:fontRef idx="minor">
+                <a:schemeClr val="lt1"/>
+              </a:fontRef>
+            </p:style>
+            <p:txBody>
+              <a:bodyPr rtlCol="0" anchor="ctr"/>
+              <a:lstStyle/>
+              <a:p>
+                <a:pPr algn="ctr"/>
+                <a:endParaRPr/>
+              </a:p>
+            </p:txBody>
+          </p:sp>
+          <p:pic>
+            <p:nvPicPr>
+              <p:cNvPr id="41" name="Picture 40" descr="image.png"/>
+              <p:cNvPicPr>
+                <a:picLocks noChangeAspect="1"/>
+              </p:cNvPicPr>
+              <p:nvPr/>
+            </p:nvPicPr>
+            <p:blipFill>
+              <a:blip r:embed="rId7"/>
+              <a:stretch>
+                <a:fillRect/>
+              </a:stretch>
+            </p:blipFill>
+            <p:spPr>
+              <a:xfrm>
+                <a:off x="4416474" y="1115317"/>
+                <a:ext cx="161925" cy="161925"/>
+              </a:xfrm>
+              <a:prstGeom prst="rect">
+                <a:avLst/>
+              </a:prstGeom>
+            </p:spPr>
+          </p:pic>
+          <p:pic>
+            <p:nvPicPr>
+              <p:cNvPr id="45" name="Picture 44" descr="image.png"/>
+              <p:cNvPicPr>
+                <a:picLocks noChangeAspect="1"/>
+              </p:cNvPicPr>
+              <p:nvPr/>
+            </p:nvPicPr>
+            <p:blipFill>
+              <a:blip r:embed="rId8"/>
+              <a:stretch>
+                <a:fillRect/>
+              </a:stretch>
+            </p:blipFill>
+            <p:spPr>
+              <a:xfrm>
+                <a:off x="6000750" y="2487215"/>
+                <a:ext cx="190500" cy="190500"/>
+              </a:xfrm>
+              <a:prstGeom prst="rect">
+                <a:avLst/>
+              </a:prstGeom>
+            </p:spPr>
+          </p:pic>
+          <p:pic>
+            <p:nvPicPr>
+              <p:cNvPr id="46" name="Picture 45" descr="image.png"/>
+              <p:cNvPicPr>
+                <a:picLocks noChangeAspect="1"/>
+              </p:cNvPicPr>
+              <p:nvPr/>
+            </p:nvPicPr>
+            <p:blipFill>
+              <a:blip r:embed="rId9"/>
+              <a:stretch>
+                <a:fillRect/>
+              </a:stretch>
+            </p:blipFill>
+            <p:spPr>
+              <a:xfrm>
+                <a:off x="6053137" y="3249215"/>
+                <a:ext cx="85725" cy="114300"/>
+              </a:xfrm>
+              <a:prstGeom prst="rect">
+                <a:avLst/>
+              </a:prstGeom>
+            </p:spPr>
+          </p:pic>
+          <p:pic>
+            <p:nvPicPr>
+              <p:cNvPr id="47" name="Picture 46" descr="image.png"/>
+              <p:cNvPicPr>
+                <a:picLocks noChangeAspect="1"/>
+              </p:cNvPicPr>
+              <p:nvPr/>
+            </p:nvPicPr>
+            <p:blipFill>
+              <a:blip r:embed="rId10"/>
+              <a:stretch>
+                <a:fillRect/>
+              </a:stretch>
+            </p:blipFill>
+            <p:spPr>
+              <a:xfrm>
+                <a:off x="6010275" y="3773090"/>
+                <a:ext cx="171450" cy="190500"/>
+              </a:xfrm>
+              <a:prstGeom prst="rect">
+                <a:avLst/>
+              </a:prstGeom>
+            </p:spPr>
+          </p:pic>
+          <p:pic>
+            <p:nvPicPr>
+              <p:cNvPr id="48" name="Picture 47" descr="image.png"/>
+              <p:cNvPicPr>
+                <a:picLocks noChangeAspect="1"/>
+              </p:cNvPicPr>
+              <p:nvPr/>
+            </p:nvPicPr>
+            <p:blipFill>
+              <a:blip r:embed="rId9"/>
+              <a:stretch>
+                <a:fillRect/>
+              </a:stretch>
+            </p:blipFill>
+            <p:spPr>
+              <a:xfrm>
+                <a:off x="6053137" y="4697015"/>
+                <a:ext cx="85725" cy="114300"/>
+              </a:xfrm>
+              <a:prstGeom prst="rect">
+                <a:avLst/>
+              </a:prstGeom>
+            </p:spPr>
+          </p:pic>
+          <p:pic>
+            <p:nvPicPr>
+              <p:cNvPr id="49" name="Picture 48" descr="image.png"/>
+              <p:cNvPicPr>
+                <a:picLocks noChangeAspect="1"/>
+              </p:cNvPicPr>
+              <p:nvPr/>
+            </p:nvPicPr>
+            <p:blipFill>
+              <a:blip r:embed="rId4"/>
+              <a:stretch>
+                <a:fillRect/>
+              </a:stretch>
+            </p:blipFill>
+            <p:spPr>
+              <a:xfrm>
+                <a:off x="6000750" y="5220890"/>
+                <a:ext cx="190500" cy="190500"/>
+              </a:xfrm>
+              <a:prstGeom prst="rect">
+                <a:avLst/>
+              </a:prstGeom>
+            </p:spPr>
+          </p:pic>
+          <p:sp>
+            <p:nvSpPr>
+              <p:cNvPr id="68" name="TextBox 67"/>
+              <p:cNvSpPr txBox="1"/>
+              <p:nvPr/>
+            </p:nvSpPr>
+            <p:spPr>
+              <a:xfrm>
+                <a:off x="4673649" y="1101030"/>
+                <a:ext cx="3197274" cy="190500"/>
+              </a:xfrm>
+              <a:prstGeom prst="rect">
+                <a:avLst/>
+              </a:prstGeom>
+              <a:noFill/>
+            </p:spPr>
+            <p:txBody>
+              <a:bodyPr wrap="square" lIns="0" tIns="0" rIns="0" bIns="0" anchor="ctr">
+                <a:spAutoFit/>
+              </a:bodyPr>
+              <a:lstStyle/>
+              <a:p>
+                <a:pPr algn="l"/>
+                <a:r>
+                  <a:rPr sz="1275" b="1" i="0" u="none" dirty="0" err="1">
+                    <a:solidFill>
+                      <a:srgbClr val="FFFFFF"/>
+                    </a:solidFill>
+                    <a:latin typeface="Inter"/>
+                  </a:rPr>
+                  <a:t>Integridade</a:t>
+                </a:r>
+                <a:r>
+                  <a:rPr sz="1275" b="1" i="0" u="none" dirty="0">
+                    <a:solidFill>
+                      <a:srgbClr val="FFFFFF"/>
+                    </a:solidFill>
+                    <a:latin typeface="Inter"/>
+                  </a:rPr>
+                  <a:t>: </a:t>
+                </a:r>
+                <a:r>
+                  <a:rPr sz="1275" b="1" i="0" u="none" dirty="0" err="1">
+                    <a:solidFill>
+                      <a:srgbClr val="FFFFFF"/>
+                    </a:solidFill>
+                    <a:latin typeface="Inter"/>
+                  </a:rPr>
+                  <a:t>restrição</a:t>
+                </a:r>
+                <a:r>
+                  <a:rPr sz="1275" b="1" i="0" u="none" dirty="0">
+                    <a:solidFill>
+                      <a:srgbClr val="FFFFFF"/>
+                    </a:solidFill>
+                    <a:latin typeface="Inter"/>
+                  </a:rPr>
+                  <a:t> </a:t>
+                </a:r>
+                <a:r>
+                  <a:rPr sz="1275" b="1" i="0" u="none" dirty="0" err="1">
+                    <a:solidFill>
+                      <a:srgbClr val="FFFFFF"/>
+                    </a:solidFill>
+                    <a:latin typeface="Inter"/>
+                  </a:rPr>
+                  <a:t>funcionando</a:t>
+                </a:r>
+                <a:endParaRPr sz="1275" b="1" i="0" u="none" dirty="0">
+                  <a:solidFill>
+                    <a:srgbClr val="FFFFFF"/>
+                  </a:solidFill>
+                  <a:latin typeface="Inter"/>
+                </a:endParaRPr>
+              </a:p>
+            </p:txBody>
+          </p:sp>
+          <p:sp>
+            <p:nvSpPr>
+              <p:cNvPr id="69" name="TextBox 68"/>
+              <p:cNvSpPr txBox="1"/>
+              <p:nvPr/>
+            </p:nvSpPr>
+            <p:spPr>
+              <a:xfrm>
+                <a:off x="4416474" y="1520130"/>
+                <a:ext cx="3454449" cy="376535"/>
+              </a:xfrm>
+              <a:prstGeom prst="rect">
+                <a:avLst/>
+              </a:prstGeom>
+              <a:noFill/>
+            </p:spPr>
+            <p:txBody>
+              <a:bodyPr wrap="square" lIns="0" tIns="0" rIns="0" bIns="0" anchor="ctr">
+                <a:spAutoFit/>
+              </a:bodyPr>
+              <a:lstStyle/>
+              <a:p>
+                <a:pPr algn="l">
+                  <a:lnSpc>
+                    <a:spcPts val="1518"/>
+                  </a:lnSpc>
+                </a:pPr>
+                <a:r>
+                  <a:rPr sz="1125" b="1" i="0" u="none">
+                    <a:solidFill>
+                      <a:srgbClr val="334155"/>
+                    </a:solidFill>
+                    <a:latin typeface="Inter"/>
+                  </a:rPr>
+                  <a:t>O banco impede cancelar uma reserva sem motivo?</a:t>
+                </a:r>
+              </a:p>
+            </p:txBody>
+          </p:sp>
+          <p:sp>
+            <p:nvSpPr>
+              <p:cNvPr id="74" name="TextBox 73"/>
+              <p:cNvSpPr txBox="1"/>
+              <p:nvPr/>
+            </p:nvSpPr>
+            <p:spPr>
+              <a:xfrm>
+                <a:off x="4397424" y="2160790"/>
+                <a:ext cx="1390650" cy="138499"/>
+              </a:xfrm>
+              <a:prstGeom prst="rect">
+                <a:avLst/>
+              </a:prstGeom>
+              <a:noFill/>
+            </p:spPr>
+            <p:txBody>
+              <a:bodyPr wrap="square" lIns="0" tIns="0" rIns="0" bIns="0" anchor="ctr">
+                <a:spAutoFit/>
+              </a:bodyPr>
+              <a:lstStyle/>
+              <a:p>
+                <a:pPr algn="l"/>
+                <a:r>
+                  <a:rPr lang="pt-BR" sz="900" b="1" i="0" u="none" dirty="0">
+                    <a:solidFill>
+                      <a:srgbClr val="475569"/>
+                    </a:solidFill>
+                    <a:latin typeface="Inter"/>
+                  </a:rPr>
+                  <a:t>     - </a:t>
+                </a:r>
+                <a:r>
+                  <a:rPr sz="900" b="1" i="0" u="none" dirty="0">
+                    <a:solidFill>
+                      <a:srgbClr val="475569"/>
+                    </a:solidFill>
+                    <a:latin typeface="Inter"/>
+                  </a:rPr>
+                  <a:t>TESTE COM ERRO</a:t>
+                </a:r>
+              </a:p>
+            </p:txBody>
+          </p:sp>
+          <p:sp>
+            <p:nvSpPr>
+              <p:cNvPr id="75" name="TextBox 74"/>
+              <p:cNvSpPr txBox="1"/>
+              <p:nvPr/>
+            </p:nvSpPr>
+            <p:spPr>
+              <a:xfrm>
+                <a:off x="4397424" y="3446665"/>
+                <a:ext cx="1428750" cy="138499"/>
+              </a:xfrm>
+              <a:prstGeom prst="rect">
+                <a:avLst/>
+              </a:prstGeom>
+              <a:noFill/>
+            </p:spPr>
+            <p:txBody>
+              <a:bodyPr wrap="square" lIns="0" tIns="0" rIns="0" bIns="0" anchor="ctr">
+                <a:spAutoFit/>
+              </a:bodyPr>
+              <a:lstStyle/>
+              <a:p>
+                <a:pPr algn="l"/>
+                <a:r>
+                  <a:rPr lang="pt-BR" sz="900" b="1" i="0" u="none" dirty="0">
+                    <a:solidFill>
+                      <a:srgbClr val="475569"/>
+                    </a:solidFill>
+                    <a:latin typeface="Inter"/>
+                  </a:rPr>
+                  <a:t>     - </a:t>
+                </a:r>
+                <a:r>
+                  <a:rPr sz="900" b="1" i="0" u="none" dirty="0">
+                    <a:solidFill>
+                      <a:srgbClr val="475569"/>
+                    </a:solidFill>
+                    <a:latin typeface="Inter"/>
+                  </a:rPr>
+                  <a:t>UPDATE CORRETO</a:t>
+                </a:r>
+              </a:p>
+            </p:txBody>
+          </p:sp>
+          <p:sp>
+            <p:nvSpPr>
+              <p:cNvPr id="76" name="TextBox 75"/>
+              <p:cNvSpPr txBox="1"/>
+              <p:nvPr/>
+            </p:nvSpPr>
+            <p:spPr>
+              <a:xfrm>
+                <a:off x="4397424" y="4894465"/>
+                <a:ext cx="1052512" cy="138499"/>
+              </a:xfrm>
+              <a:prstGeom prst="rect">
+                <a:avLst/>
+              </a:prstGeom>
+              <a:noFill/>
+            </p:spPr>
+            <p:txBody>
+              <a:bodyPr wrap="square" lIns="0" tIns="0" rIns="0" bIns="0" anchor="ctr">
+                <a:spAutoFit/>
+              </a:bodyPr>
+              <a:lstStyle/>
+              <a:p>
+                <a:pPr algn="l"/>
+                <a:r>
+                  <a:rPr lang="pt-BR" sz="900" b="1" i="0" u="none" dirty="0">
+                    <a:solidFill>
+                      <a:srgbClr val="475569"/>
+                    </a:solidFill>
+                    <a:latin typeface="Inter"/>
+                  </a:rPr>
+                  <a:t>     - </a:t>
+                </a:r>
+                <a:r>
+                  <a:rPr sz="900" b="1" i="0" u="none" dirty="0">
+                    <a:solidFill>
+                      <a:srgbClr val="475569"/>
+                    </a:solidFill>
+                    <a:latin typeface="Inter"/>
+                  </a:rPr>
+                  <a:t>RESULTADO</a:t>
+                </a:r>
+              </a:p>
+            </p:txBody>
+          </p:sp>
+          <p:sp>
+            <p:nvSpPr>
+              <p:cNvPr id="79" name="TextBox 78"/>
+              <p:cNvSpPr txBox="1"/>
+              <p:nvPr/>
+            </p:nvSpPr>
+            <p:spPr>
+              <a:xfrm>
+                <a:off x="4254549" y="2144315"/>
+                <a:ext cx="457200" cy="171450"/>
+              </a:xfrm>
+              <a:prstGeom prst="rect">
+                <a:avLst/>
+              </a:prstGeom>
+              <a:noFill/>
+            </p:spPr>
+            <p:txBody>
+              <a:bodyPr wrap="square" lIns="0" tIns="0" rIns="0" bIns="0" anchor="ctr">
+                <a:spAutoFit/>
+              </a:bodyPr>
+              <a:lstStyle/>
+              <a:p>
+                <a:pPr algn="ctr"/>
+                <a:r>
+                  <a:rPr sz="825" b="1" i="0" u="none">
+                    <a:solidFill>
+                      <a:srgbClr val="1E293B"/>
+                    </a:solidFill>
+                    <a:latin typeface="Inter"/>
+                  </a:rPr>
+                  <a:t>1</a:t>
+                </a:r>
+              </a:p>
+            </p:txBody>
+          </p:sp>
+          <p:sp>
+            <p:nvSpPr>
+              <p:cNvPr id="80" name="TextBox 79"/>
+              <p:cNvSpPr txBox="1"/>
+              <p:nvPr/>
+            </p:nvSpPr>
+            <p:spPr>
+              <a:xfrm>
+                <a:off x="4397424" y="2734865"/>
+                <a:ext cx="3397299" cy="323850"/>
+              </a:xfrm>
+              <a:prstGeom prst="rect">
+                <a:avLst/>
+              </a:prstGeom>
+              <a:noFill/>
+            </p:spPr>
+            <p:txBody>
+              <a:bodyPr wrap="square" lIns="0" tIns="0" rIns="0" bIns="0" anchor="t">
+                <a:spAutoFit/>
+              </a:bodyPr>
+              <a:lstStyle/>
+              <a:p>
+                <a:pPr algn="ctr"/>
+                <a:r>
+                  <a:rPr sz="975" b="1" i="0" u="none">
+                    <a:solidFill>
+                      <a:srgbClr val="B91C1C"/>
+                    </a:solidFill>
+                    <a:latin typeface="JetBrains Mono"/>
+                  </a:rPr>
+                  <a:t>[INSERIR PRINT: UPDATE sem data e motivo e a mensagem de erro de CHECK]</a:t>
+                </a:r>
+              </a:p>
+            </p:txBody>
+          </p:sp>
+          <p:sp>
+            <p:nvSpPr>
+              <p:cNvPr id="81" name="TextBox 80"/>
+              <p:cNvSpPr txBox="1"/>
+              <p:nvPr/>
+            </p:nvSpPr>
+            <p:spPr>
+              <a:xfrm>
+                <a:off x="4254549" y="3430190"/>
+                <a:ext cx="457200" cy="171450"/>
+              </a:xfrm>
+              <a:prstGeom prst="rect">
+                <a:avLst/>
+              </a:prstGeom>
+              <a:noFill/>
+            </p:spPr>
+            <p:txBody>
+              <a:bodyPr wrap="square" lIns="0" tIns="0" rIns="0" bIns="0" anchor="ctr">
+                <a:spAutoFit/>
+              </a:bodyPr>
+              <a:lstStyle/>
+              <a:p>
+                <a:pPr algn="ctr"/>
+                <a:r>
+                  <a:rPr sz="825" b="1" i="0" u="none">
+                    <a:solidFill>
+                      <a:srgbClr val="1E293B"/>
+                    </a:solidFill>
+                    <a:latin typeface="Inter"/>
+                  </a:rPr>
+                  <a:t>2</a:t>
+                </a:r>
+              </a:p>
+            </p:txBody>
+          </p:sp>
+          <p:sp>
+            <p:nvSpPr>
+              <p:cNvPr id="82" name="TextBox 81"/>
+              <p:cNvSpPr txBox="1"/>
+              <p:nvPr/>
+            </p:nvSpPr>
+            <p:spPr>
+              <a:xfrm>
+                <a:off x="4397424" y="4020740"/>
+                <a:ext cx="3397299" cy="485775"/>
+              </a:xfrm>
+              <a:prstGeom prst="rect">
+                <a:avLst/>
+              </a:prstGeom>
+              <a:noFill/>
+            </p:spPr>
+            <p:txBody>
+              <a:bodyPr wrap="square" lIns="0" tIns="0" rIns="0" bIns="0" anchor="t">
+                <a:spAutoFit/>
+              </a:bodyPr>
+              <a:lstStyle/>
+              <a:p>
+                <a:pPr algn="ctr"/>
+                <a:r>
+                  <a:rPr sz="975" b="1" i="0" u="none">
+                    <a:solidFill>
+                      <a:srgbClr val="475569"/>
+                    </a:solidFill>
+                    <a:latin typeface="JetBrains Mono"/>
+                  </a:rPr>
+                  <a:t>[INSERIR PRINT: UPDATE com DATA_CANCELAMENTO e MOTIVO_CANCELAMENTO executado com sucesso]</a:t>
+                </a:r>
+              </a:p>
+            </p:txBody>
+          </p:sp>
+          <p:sp>
+            <p:nvSpPr>
+              <p:cNvPr id="83" name="TextBox 82"/>
+              <p:cNvSpPr txBox="1"/>
+              <p:nvPr/>
+            </p:nvSpPr>
+            <p:spPr>
+              <a:xfrm>
+                <a:off x="4254549" y="4877990"/>
+                <a:ext cx="457200" cy="171450"/>
+              </a:xfrm>
+              <a:prstGeom prst="rect">
+                <a:avLst/>
+              </a:prstGeom>
+              <a:noFill/>
+            </p:spPr>
+            <p:txBody>
+              <a:bodyPr wrap="square" lIns="0" tIns="0" rIns="0" bIns="0" anchor="ctr">
+                <a:spAutoFit/>
+              </a:bodyPr>
+              <a:lstStyle/>
+              <a:p>
+                <a:pPr algn="ctr"/>
+                <a:r>
+                  <a:rPr sz="825" b="1" i="0" u="none">
+                    <a:solidFill>
+                      <a:srgbClr val="1E293B"/>
+                    </a:solidFill>
+                    <a:latin typeface="Inter"/>
+                  </a:rPr>
+                  <a:t>3</a:t>
+                </a:r>
+              </a:p>
+            </p:txBody>
+          </p:sp>
+          <p:pic>
+            <p:nvPicPr>
+              <p:cNvPr id="101" name="Imagem 100">
+                <a:extLst>
+                  <a:ext uri="{FF2B5EF4-FFF2-40B4-BE49-F238E27FC236}">
+                    <a16:creationId xmlns:a16="http://schemas.microsoft.com/office/drawing/2014/main" id="{72132D0F-062B-4450-9F94-80F977F6032E}"/>
+                  </a:ext>
+                </a:extLst>
+              </p:cNvPr>
+              <p:cNvPicPr>
+                <a:picLocks noChangeAspect="1"/>
+              </p:cNvPicPr>
+              <p:nvPr/>
+            </p:nvPicPr>
+            <p:blipFill>
+              <a:blip r:embed="rId11"/>
+              <a:stretch>
+                <a:fillRect/>
+              </a:stretch>
+            </p:blipFill>
+            <p:spPr>
+              <a:xfrm>
+                <a:off x="4424039" y="2390269"/>
+                <a:ext cx="3370683" cy="726787"/>
+              </a:xfrm>
+              <a:prstGeom prst="rect">
+                <a:avLst/>
+              </a:prstGeom>
+            </p:spPr>
+          </p:pic>
+          <p:pic>
+            <p:nvPicPr>
+              <p:cNvPr id="103" name="Imagem 102">
+                <a:extLst>
+                  <a:ext uri="{FF2B5EF4-FFF2-40B4-BE49-F238E27FC236}">
+                    <a16:creationId xmlns:a16="http://schemas.microsoft.com/office/drawing/2014/main" id="{F17376E4-05E5-412C-8E8C-C98314F45B61}"/>
+                  </a:ext>
+                </a:extLst>
+              </p:cNvPr>
+              <p:cNvPicPr>
+                <a:picLocks noChangeAspect="1"/>
+              </p:cNvPicPr>
+              <p:nvPr/>
+            </p:nvPicPr>
+            <p:blipFill>
+              <a:blip r:embed="rId12"/>
+              <a:stretch>
+                <a:fillRect/>
+              </a:stretch>
+            </p:blipFill>
+            <p:spPr>
+              <a:xfrm>
+                <a:off x="4458781" y="3663462"/>
+                <a:ext cx="3335941" cy="919253"/>
+              </a:xfrm>
+              <a:prstGeom prst="rect">
+                <a:avLst/>
+              </a:prstGeom>
+            </p:spPr>
+          </p:pic>
+          <p:pic>
+            <p:nvPicPr>
+              <p:cNvPr id="105" name="Imagem 104">
+                <a:extLst>
+                  <a:ext uri="{FF2B5EF4-FFF2-40B4-BE49-F238E27FC236}">
+                    <a16:creationId xmlns:a16="http://schemas.microsoft.com/office/drawing/2014/main" id="{F4895028-0AB6-4B71-90BD-B1EC5B354884}"/>
+                  </a:ext>
+                </a:extLst>
+              </p:cNvPr>
+              <p:cNvPicPr>
+                <a:picLocks noChangeAspect="1"/>
+              </p:cNvPicPr>
+              <p:nvPr/>
+            </p:nvPicPr>
+            <p:blipFill>
+              <a:blip r:embed="rId13"/>
+              <a:stretch>
+                <a:fillRect/>
+              </a:stretch>
+            </p:blipFill>
+            <p:spPr>
+              <a:xfrm>
+                <a:off x="4467722" y="5145723"/>
+                <a:ext cx="3220340" cy="1359852"/>
+              </a:xfrm>
+              <a:prstGeom prst="rect">
+                <a:avLst/>
+              </a:prstGeom>
+            </p:spPr>
+          </p:pic>
+        </p:grpSp>
+      </p:grpSp>
       <p:sp>
         <p:nvSpPr>
           <p:cNvPr id="116" name="Retângulo 115">
@@ -26243,6 +25028,66 @@
           </a:p>
         </p:txBody>
       </p:sp>
+      <p:pic>
+        <p:nvPicPr>
+          <p:cNvPr id="52" name="Imagem 51">
+            <a:extLst>
+              <a:ext uri="{FF2B5EF4-FFF2-40B4-BE49-F238E27FC236}">
+                <a16:creationId xmlns:a16="http://schemas.microsoft.com/office/drawing/2014/main" id="{6AE30455-1781-42C5-9899-923DC331251A}"/>
+              </a:ext>
+            </a:extLst>
+          </p:cNvPr>
+          <p:cNvPicPr>
+            <a:picLocks noChangeAspect="1"/>
+          </p:cNvPicPr>
+          <p:nvPr/>
+        </p:nvPicPr>
+        <p:blipFill>
+          <a:blip r:embed="rId14"/>
+          <a:stretch>
+            <a:fillRect/>
+          </a:stretch>
+        </p:blipFill>
+        <p:spPr>
+          <a:xfrm>
+            <a:off x="6982890" y="3565623"/>
+            <a:ext cx="3335941" cy="425351"/>
+          </a:xfrm>
+          <a:prstGeom prst="rect">
+            <a:avLst/>
+          </a:prstGeom>
+        </p:spPr>
+      </p:pic>
+      <p:pic>
+        <p:nvPicPr>
+          <p:cNvPr id="54" name="Imagem 53">
+            <a:extLst>
+              <a:ext uri="{FF2B5EF4-FFF2-40B4-BE49-F238E27FC236}">
+                <a16:creationId xmlns:a16="http://schemas.microsoft.com/office/drawing/2014/main" id="{07DEBC54-FBC2-4E3C-904F-3CAE5A154C59}"/>
+              </a:ext>
+            </a:extLst>
+          </p:cNvPr>
+          <p:cNvPicPr>
+            <a:picLocks noChangeAspect="1"/>
+          </p:cNvPicPr>
+          <p:nvPr/>
+        </p:nvPicPr>
+        <p:blipFill>
+          <a:blip r:embed="rId15"/>
+          <a:stretch>
+            <a:fillRect/>
+          </a:stretch>
+        </p:blipFill>
+        <p:spPr>
+          <a:xfrm>
+            <a:off x="7001562" y="5634612"/>
+            <a:ext cx="3228114" cy="718564"/>
+          </a:xfrm>
+          <a:prstGeom prst="rect">
+            <a:avLst/>
+          </a:prstGeom>
+        </p:spPr>
+      </p:pic>
     </p:spTree>
   </p:cSld>
   <p:clrMapOvr>
@@ -29233,7 +28078,7 @@
           <p:nvPr>
             <p:extLst>
               <p:ext uri="{D42A27DB-BD31-4B8C-83A1-F6EECF244321}">
-                <p14:modId xmlns:p14="http://schemas.microsoft.com/office/powerpoint/2010/main" val="3194149912"/>
+                <p14:modId xmlns:p14="http://schemas.microsoft.com/office/powerpoint/2010/main" val="1121279433"/>
               </p:ext>
             </p:extLst>
           </p:nvPr>
@@ -29291,13 +28136,13 @@
                     <a:p>
                       <a:pPr algn="ctr"/>
                       <a:r>
-                        <a:rPr sz="1050" b="1" i="0" u="none" dirty="0" err="1">
+                        <a:rPr lang="pt-BR" sz="1050" b="1" i="0" u="none" dirty="0">
                           <a:solidFill>
                             <a:srgbClr val="FFFFFF"/>
                           </a:solidFill>
                           <a:latin typeface="Inter"/>
                         </a:rPr>
-                        <a:t>Solução</a:t>
+                        <a:t>Proposta</a:t>
                       </a:r>
                       <a:endParaRPr sz="1050" b="1" i="0" u="none" dirty="0">
                         <a:solidFill>
